--- a/presentations/coa/Binary_Storage_and_Registers_8slides_COA.pptx
+++ b/presentations/coa/Binary_Storage_and_Registers_8slides_COA.pptx
@@ -509,27 +509,54 @@
           <a:lstStyle/>
           <a:p>
             <a:r>
-              <a:t>Good morning. My topic is Binary Storage and Registers.</a:t>
-            </a:r>
-          </a:p>
-          <a:p>
-            <a:r>
-              <a:t>Two questions drive the whole presentation: how does a machine that only understands</a:t>
-            </a:r>
-          </a:p>
-          <a:p>
-            <a:r>
-              <a:t>ON and OFF keep a value, and where does it keep that value while it is working on it?</a:t>
-            </a:r>
-          </a:p>
-          <a:p>
-            <a:r>
-              <a:t>The answer to the first is the binary storage cell; the answer to the second is the</a:t>
-            </a:r>
-          </a:p>
-          <a:p>
-            <a:r>
-              <a:t>register. Everything else in the CPU is built on top of these two ideas.</a:t>
+              <a:t>== SAY THIS (one line) ==</a:t>
+            </a:r>
+          </a:p>
+          <a:p>
+            <a:r>
+              <a:t>My topic is how a computer stores 1s and 0s, and where it keeps them.</a:t>
+            </a:r>
+          </a:p>
+          <a:p/>
+          <a:p>
+            <a:r>
+              <a:t>== FULL SCRIPT ==</a:t>
+            </a:r>
+          </a:p>
+          <a:p>
+            <a:r>
+              <a:t>- Good morning. My topic is Binary Storage and Registers.</a:t>
+            </a:r>
+          </a:p>
+          <a:p>
+            <a:r>
+              <a:t>- My aim is simple: to answer two questions.</a:t>
+            </a:r>
+          </a:p>
+          <a:p>
+            <a:r>
+              <a:t>- First, how does a machine that only understands ON and OFF keep a number?</a:t>
+            </a:r>
+          </a:p>
+          <a:p>
+            <a:r>
+              <a:t>- Second, where does it keep that number while it is calculating?</a:t>
+            </a:r>
+          </a:p>
+          <a:p>
+            <a:r>
+              <a:t>- By the end you will see that the answer to the first is a tiny circuit called a flip-flop, and the answer to the second is a register.</a:t>
+            </a:r>
+          </a:p>
+          <a:p/>
+          <a:p>
+            <a:r>
+              <a:t>== IF ASKED ==</a:t>
+            </a:r>
+          </a:p>
+          <a:p>
+            <a:r>
+              <a:t>Nothing yet - just set up the two questions.</a:t>
             </a:r>
           </a:p>
         </p:txBody>
@@ -599,22 +626,64 @@
           <a:lstStyle/>
           <a:p>
             <a:r>
-              <a:t>Here is the route, and it is one straight line: bits, then the circuit that stores a</a:t>
-            </a:r>
-          </a:p>
-          <a:p>
-            <a:r>
-              <a:t>bit, then many of those circuits in a row (a register), then how registers are</a:t>
-            </a:r>
-          </a:p>
-          <a:p>
-            <a:r>
-              <a:t>controlled and moved into each other, and finally where registers fit in the memory</a:t>
-            </a:r>
-          </a:p>
-          <a:p>
-            <a:r>
-              <a:t>hierarchy, with one worked example. Every later slide reuses the one before it.</a:t>
+              <a:t>== SAY THIS (one line) ==</a:t>
+            </a:r>
+          </a:p>
+          <a:p>
+            <a:r>
+              <a:t>Six short steps, and each one uses the step before it.</a:t>
+            </a:r>
+          </a:p>
+          <a:p/>
+          <a:p>
+            <a:r>
+              <a:t>== FULL SCRIPT ==</a:t>
+            </a:r>
+          </a:p>
+          <a:p>
+            <a:r>
+              <a:t>- Here is the route I will follow, and it is a ladder.</a:t>
+            </a:r>
+          </a:p>
+          <a:p>
+            <a:r>
+              <a:t>- Step one: bits - what binary is and how many values fit in a few bits.</a:t>
+            </a:r>
+          </a:p>
+          <a:p>
+            <a:r>
+              <a:t>- Step two: the small circuit that can hold one bit.</a:t>
+            </a:r>
+          </a:p>
+          <a:p>
+            <a:r>
+              <a:t>- Step three: a register - just many of those circuits in a row.</a:t>
+            </a:r>
+          </a:p>
+          <a:p>
+            <a:r>
+              <a:t>- Step four: how we control a register, move values between registers, and share one wire between them.</a:t>
+            </a:r>
+          </a:p>
+          <a:p>
+            <a:r>
+              <a:t>- Step five: where registers sit in the computer, plus one worked example.</a:t>
+            </a:r>
+          </a:p>
+          <a:p>
+            <a:r>
+              <a:t>- Step six: a short summary, and then your questions.</a:t>
+            </a:r>
+          </a:p>
+          <a:p/>
+          <a:p>
+            <a:r>
+              <a:t>== IF ASKED ==</a:t>
+            </a:r>
+          </a:p>
+          <a:p>
+            <a:r>
+              <a:t>No numbers to remember here, just the order.</a:t>
             </a:r>
           </a:p>
         </p:txBody>
@@ -684,47 +753,59 @@
           <a:lstStyle/>
           <a:p>
             <a:r>
-              <a:t>Why binary at all? Because a transistor that is either fully off or fully on is cheap,</a:t>
-            </a:r>
-          </a:p>
-          <a:p>
-            <a:r>
-              <a:t>fast and immune to small noise. A single bit answers one yes/no question; with n bits</a:t>
-            </a:r>
-          </a:p>
-          <a:p>
-            <a:r>
-              <a:t>we get two to the n patterns - 256 for a byte, 4.3 billion for 32 bits, which is why</a:t>
-            </a:r>
-          </a:p>
-          <a:p>
-            <a:r>
-              <a:t>IPv4 ran out of addresses.</a:t>
-            </a:r>
-          </a:p>
-          <a:p>
-            <a:r>
-              <a:t>The same eight bits can be written in binary, octal, decimal or hex. Hex exists purely</a:t>
-            </a:r>
-          </a:p>
-          <a:p>
-            <a:r>
-              <a:t>for humans: four bits are one hex digit, so a byte is always two characters, which is</a:t>
-            </a:r>
-          </a:p>
-          <a:p>
-            <a:r>
-              <a:t>why memory dumps and addresses are shown that way.</a:t>
-            </a:r>
-          </a:p>
-          <a:p>
-            <a:r>
-              <a:t>And the units are powers of two for the same reason: k address bits give 2 to the k</a:t>
-            </a:r>
-          </a:p>
-          <a:p>
-            <a:r>
-              <a:t>locations. That is why 1 KB is 1024 bytes and not 1000.</a:t>
+              <a:t>== SAY THIS (one line) ==</a:t>
+            </a:r>
+          </a:p>
+          <a:p>
+            <a:r>
+              <a:t>A bit is just ON or OFF. Each extra bit doubles the values you can store.</a:t>
+            </a:r>
+          </a:p>
+          <a:p/>
+          <a:p>
+            <a:r>
+              <a:t>== FULL SCRIPT ==</a:t>
+            </a:r>
+          </a:p>
+          <a:p>
+            <a:r>
+              <a:t>- Everything inside a computer is either ON or OFF. We write ON as 1 and OFF as 0, and one such digit is called a bit.</a:t>
+            </a:r>
+          </a:p>
+          <a:p>
+            <a:r>
+              <a:t>- Why only two states? Because a transistor that is fully off or fully on is cheap, fast, and does not get confused by small electrical noise.</a:t>
+            </a:r>
+          </a:p>
+          <a:p>
+            <a:r>
+              <a:t>- Here is eight bits in a row, and above each one its weight: 128, 64, 32, 16, 8, 4, 2, 1. To read the number, add the weights where there is a 1.</a:t>
+            </a:r>
+          </a:p>
+          <a:p>
+            <a:r>
+              <a:t>- In this example 128 plus 32 plus 16 plus 4 gives 180. The same eight bits can be written as 180 in decimal, or as B4 in hexadecimal - it is the same value, just a shorter way of writing it.</a:t>
+            </a:r>
+          </a:p>
+          <a:p>
+            <a:r>
+              <a:t>- Now the pattern to remember: with n bits you can make two to the power n different values. One bit gives 2, four bits give 16, eight bits give 256, and thirty-two bits give about 4.3 billion - which is why there are that many internet addresses in IPv4.</a:t>
+            </a:r>
+          </a:p>
+          <a:p>
+            <a:r>
+              <a:t>- And because memory is addressed with bits, sizes also come in powers of two: one kilobyte is 1024 bytes, not 1000.</a:t>
+            </a:r>
+          </a:p>
+          <a:p/>
+          <a:p>
+            <a:r>
+              <a:t>== IF ASKED ==</a:t>
+            </a:r>
+          </a:p>
+          <a:p>
+            <a:r>
+              <a:t>If someone asks why 1024: k address bits give 2^k locations, so capacities naturally land on powers of two.</a:t>
             </a:r>
           </a:p>
         </p:txBody>
@@ -794,52 +875,54 @@
           <a:lstStyle/>
           <a:p>
             <a:r>
-              <a:t>This slide answers the physical question: what actually remembers a bit?</a:t>
-            </a:r>
-          </a:p>
-          <a:p>
-            <a:r>
-              <a:t>The SR latch is two NOR gates feeding each other - a circuit that argues itself into a</a:t>
-            </a:r>
-          </a:p>
-          <a:p>
-            <a:r>
-              <a:t>stable answer and keeps it. Cheap, but level-sensitive.</a:t>
-            </a:r>
-          </a:p>
-          <a:p>
-            <a:r>
-              <a:t>The D flip-flop is the workhorse: it samples D only on the rising clock edge, so the</a:t>
-            </a:r>
-          </a:p>
-          <a:p>
-            <a:r>
-              <a:t>whole design has a predictable rhythm. When we say a register is n flip-flops, this is</a:t>
-            </a:r>
-          </a:p>
-          <a:p>
-            <a:r>
-              <a:t>the box we mean.</a:t>
-            </a:r>
-          </a:p>
-          <a:p>
-            <a:r>
-              <a:t>The DRAM cell is one transistor plus one capacitor: charge means 1. It is tiny, so you</a:t>
-            </a:r>
-          </a:p>
-          <a:p>
-            <a:r>
-              <a:t>get gigabits per chip, but the charge leaks and must be refreshed every few tens of</a:t>
-            </a:r>
-          </a:p>
-          <a:p>
-            <a:r>
-              <a:t>milliseconds. That trade-off - six transistors for speed, one transistor for density -</a:t>
-            </a:r>
-          </a:p>
-          <a:p>
-            <a:r>
-              <a:t>is the whole reason the memory hierarchy exists.</a:t>
+              <a:t>== SAY THIS (one line) ==</a:t>
+            </a:r>
+          </a:p>
+          <a:p>
+            <a:r>
+              <a:t>A flip-flop remembers one bit by feeding its own output back into itself.</a:t>
+            </a:r>
+          </a:p>
+          <a:p/>
+          <a:p>
+            <a:r>
+              <a:t>== FULL SCRIPT ==</a:t>
+            </a:r>
+          </a:p>
+          <a:p>
+            <a:r>
+              <a:t>- A bit has to survive after we stop sending it, so we need a circuit that can hold a state. There are three you should know.</a:t>
+            </a:r>
+          </a:p>
+          <a:p>
+            <a:r>
+              <a:t>- First, the SR latch: two NOR gates whose outputs feed each other's inputs. Because each gate keeps the other going, the value stays put with no clock at all. It is simple, but it reacts to its inputs at any time, which makes large designs messy.</a:t>
+            </a:r>
+          </a:p>
+          <a:p>
+            <a:r>
+              <a:t>- Second, the D flip-flop. It only looks at its input at the moment the clock ticks - the rising edge. So the whole circuit moves in step, and we get predictable timing. This is the standard one-bit memory, and it is what a register is built from.</a:t>
+            </a:r>
+          </a:p>
+          <a:p>
+            <a:r>
+              <a:t>- Third, the DRAM cell used in main memory: one transistor and one capacitor. Charge on the capacitor means 1, no charge means 0. It is tiny, so you get gigabytes, but the charge leaks away, so it must be refreshed about every 64 milliseconds.</a:t>
+            </a:r>
+          </a:p>
+          <a:p>
+            <a:r>
+              <a:t>- That is the trade-off to remember: a flip-flop uses about six transistors per bit and never needs refreshing - fast, and used inside the processor. A DRAM cell uses one transistor plus a capacitor and needs refresh - cheap and dense, and used for main memory.</a:t>
+            </a:r>
+          </a:p>
+          <a:p/>
+          <a:p>
+            <a:r>
+              <a:t>== IF ASKED ==</a:t>
+            </a:r>
+          </a:p>
+          <a:p>
+            <a:r>
+              <a:t>If asked why DRAM needs refreshing: the capacitor leaks, so every cell is read and written back periodically.</a:t>
             </a:r>
           </a:p>
         </p:txBody>
@@ -909,62 +992,54 @@
           <a:lstStyle/>
           <a:p>
             <a:r>
-              <a:t>Now we scale a bit up. A register is just n flip-flops side by side sharing one clock</a:t>
-            </a:r>
-          </a:p>
-          <a:p>
-            <a:r>
-              <a:t>line. Because they all sample the same edge, the word is written atomically - you never</a:t>
-            </a:r>
-          </a:p>
-          <a:p>
-            <a:r>
-              <a:t>read half the new value and half the old. An 8-bit register is eight flip-flops; a</a:t>
-            </a:r>
-          </a:p>
-          <a:p>
-            <a:r>
-              <a:t>64-bit register is sixty-four.</a:t>
-            </a:r>
-          </a:p>
-          <a:p>
-            <a:r>
-              <a:t>Crucially, a register has no address: it is selected by name in the instruction, which</a:t>
-            </a:r>
-          </a:p>
-          <a:p>
-            <a:r>
-              <a:t>is why it costs one cycle instead of a memory round trip.</a:t>
-            </a:r>
-          </a:p>
-          <a:p>
-            <a:r>
-              <a:t>The table is the cast of characters: the PC makes a program a sequence, the IR holds what</a:t>
-            </a:r>
-          </a:p>
-          <a:p>
-            <a:r>
-              <a:t>is being decoded, MAR and MDR are the only route to memory, the accumulator is the</a:t>
-            </a:r>
-          </a:p>
-          <a:p>
-            <a:r>
-              <a:t>classic one-operand design, the stack pointer makes calls possible, and the status</a:t>
-            </a:r>
-          </a:p>
-          <a:p>
-            <a:r>
-              <a:t>register makes branches possible. All of them are the same hardware underneath.</a:t>
-            </a:r>
-          </a:p>
-          <a:p>
-            <a:r>
-              <a:t>Register transfer notation is how we write data movement: R2 arrow R1 means copy R1 into</a:t>
-            </a:r>
-          </a:p>
-          <a:p>
-            <a:r>
-              <a:t>R2, and it executes only when its control signal is asserted.</a:t>
+              <a:t>== SAY THIS (one line) ==</a:t>
+            </a:r>
+          </a:p>
+          <a:p>
+            <a:r>
+              <a:t>A register is a row of flip-flops that all take a new value at the same instant.</a:t>
+            </a:r>
+          </a:p>
+          <a:p/>
+          <a:p>
+            <a:r>
+              <a:t>== FULL SCRIPT ==</a:t>
+            </a:r>
+          </a:p>
+          <a:p>
+            <a:r>
+              <a:t>- A register is nothing new. It is a group of flip-flops, one per bit, sharing one clock line.</a:t>
+            </a:r>
+          </a:p>
+          <a:p>
+            <a:r>
+              <a:t>- Because all of them hear the same clock edge, all bits change together. You never read a register and find half the new value and half the old one.</a:t>
+            </a:r>
+          </a:p>
+          <a:p>
+            <a:r>
+              <a:t>- The width is just the count: an eight-bit register is eight flip-flops, a sixty-four-bit register is sixty-four. And a register has no address - the instruction names it directly, which is why using it costs one cycle instead of a trip to memory.</a:t>
+            </a:r>
+          </a:p>
+          <a:p>
+            <a:r>
+              <a:t>- The table shows the registers you meet inside a processor. The program counter holds the address of the next instruction, which is what makes a program a sequence. The instruction register holds the instruction being decoded. The memory address and memory data registers are the only way to talk to memory. The accumulator keeps an intermediate result, the stack pointer makes function calls possible, and the status register holds the flags used by conditional branches.</a:t>
+            </a:r>
+          </a:p>
+          <a:p>
+            <a:r>
+              <a:t>- Finally, the notation. R2 arrow R1 means copy R1 into R2. Read it right to left: the source is copied, the destination is overwritten. It only happens when the control signal for that transfer is 1.</a:t>
+            </a:r>
+          </a:p>
+          <a:p/>
+          <a:p>
+            <a:r>
+              <a:t>== IF ASKED ==</a:t>
+            </a:r>
+          </a:p>
+          <a:p>
+            <a:r>
+              <a:t>If asked 'does R1 lose its value?' - no, a transfer is a copy.</a:t>
             </a:r>
           </a:p>
         </p:txBody>
@@ -1034,57 +1109,54 @@
           <a:lstStyle/>
           <a:p>
             <a:r>
-              <a:t>Three control ideas, all on one slide.</a:t>
-            </a:r>
-          </a:p>
-          <a:p>
-            <a:r>
-              <a:t>Parallel load: a two-to-one multiplexer sits in front of every flip-flop. With Load</a:t>
-            </a:r>
-          </a:p>
-          <a:p>
-            <a:r>
-              <a:t>high it passes the external data; with Load low it feeds the flip-flop's own output</a:t>
-            </a:r>
-          </a:p>
-          <a:p>
-            <a:r>
-              <a:t>back, so the register holds. That is why every real processor has write-enable signals.</a:t>
-            </a:r>
-          </a:p>
-          <a:p>
-            <a:r>
-              <a:t>Shift: connect each Q to the next D and bits march one position per clock. Left shift</a:t>
-            </a:r>
-          </a:p>
-          <a:p>
-            <a:r>
-              <a:t>doubles, right shift halves, and a rotate brings the bit that fell off one end back in</a:t>
-            </a:r>
-          </a:p>
-          <a:p>
-            <a:r>
-              <a:t>at the other, so nothing is lost.</a:t>
-            </a:r>
-          </a:p>
-          <a:p>
-            <a:r>
-              <a:t>Bus: if every register had its own path to every other register the wire count grows as n</a:t>
-            </a:r>
-          </a:p>
-          <a:p>
-            <a:r>
-              <a:t>squared. Instead all registers share one bus through tri-state buffers, which can be</a:t>
-            </a:r>
-          </a:p>
-          <a:p>
-            <a:r>
-              <a:t>0, 1 or high impedance. Exactly one may be enabled - two at once is bus contention, a</a:t>
-            </a:r>
-          </a:p>
-          <a:p>
-            <a:r>
-              <a:t>short circuit rather than just a wrong value.</a:t>
+              <a:t>== SAY THIS (one line) ==</a:t>
+            </a:r>
+          </a:p>
+          <a:p>
+            <a:r>
+              <a:t>A register changes only when a control signal tells it to - and only one register may drive the shared wire.</a:t>
+            </a:r>
+          </a:p>
+          <a:p/>
+          <a:p>
+            <a:r>
+              <a:t>== FULL SCRIPT ==</a:t>
+            </a:r>
+          </a:p>
+          <a:p>
+            <a:r>
+              <a:t>- Three small ideas control everything.</a:t>
+            </a:r>
+          </a:p>
+          <a:p>
+            <a:r>
+              <a:t>- One: parallel load. In front of every flip-flop there is a two-to-one selector. If the Load signal is 1, the selector passes the new data in. If Load is 0, it feeds the flip-flop's own output back, so the value is held. That is why processors have write-enable signals.</a:t>
+            </a:r>
+          </a:p>
+          <a:p>
+            <a:r>
+              <a:t>- Two: shifting. Connect each flip-flop's output to the next one's input, and with each clock every bit moves one place. Shifting left multiplies by two, shifting right divides by two, and a rotate sends the bit that falls off one end back in at the other end so nothing is lost. The little table shows 1011 moving right, one position per clock.</a:t>
+            </a:r>
+          </a:p>
+          <a:p>
+            <a:r>
+              <a:t>- Three: the bus. If every register had its own private path to every other register, the wiring would grow with the square of the number of registers. Instead they all share one bus, through tri-state buffers which can be 0, 1, or disconnected - that third state is called high impedance.</a:t>
+            </a:r>
+          </a:p>
+          <a:p>
+            <a:r>
+              <a:t>- But here is the rule: exactly one register may be enabled at a time. If two drive the wire together, one tries to pull it high while the other pulls it low, and that is a short circuit, not just a wrong value.</a:t>
+            </a:r>
+          </a:p>
+          <a:p/>
+          <a:p>
+            <a:r>
+              <a:t>== IF ASKED ==</a:t>
+            </a:r>
+          </a:p>
+          <a:p>
+            <a:r>
+              <a:t>If asked what the third state is: high impedance, electrically disconnected, so the wire is left alone.</a:t>
             </a:r>
           </a:p>
         </p:txBody>
@@ -1154,52 +1226,59 @@
           <a:lstStyle/>
           <a:p>
             <a:r>
-              <a:t>Placement first. The bit in a register and the bit in RAM are logically identical but</a:t>
-            </a:r>
-          </a:p>
-          <a:p>
-            <a:r>
-              <a:t>physically very different. A register is flip-flops inside the CPU, selected by name,</a:t>
-            </a:r>
-          </a:p>
-          <a:p>
-            <a:r>
-              <a:t>read in a fraction of a cycle. Cache is SRAM at a few nanoseconds, main memory is DRAM</a:t>
-            </a:r>
-          </a:p>
-          <a:p>
-            <a:r>
-              <a:t>at tens of nanoseconds, disk is microseconds to milliseconds. We cannot make everything</a:t>
-            </a:r>
-          </a:p>
-          <a:p>
-            <a:r>
-              <a:t>registers because a flip-flop costs about six transistors per bit against one transistor</a:t>
-            </a:r>
-          </a:p>
-          <a:p>
-            <a:r>
-              <a:t>and a capacitor for DRAM - you could never fit gigabytes that way.</a:t>
-            </a:r>
-          </a:p>
-          <a:p>
-            <a:r>
-              <a:t>Then the example, all on the same eight flip-flops. R1 holds 0000 1101, which is 13.</a:t>
-            </a:r>
-          </a:p>
-          <a:p>
-            <a:r>
-              <a:t>A load overwrites the whole word at once. A left shift gives 0001 1010 = 26, a right</a:t>
-            </a:r>
-          </a:p>
-          <a:p>
-            <a:r>
-              <a:t>shift gives 0000 0110 = 6 with the remainder lost, and a rotate gives 1000 0110 = 134</a:t>
-            </a:r>
-          </a:p>
-          <a:p>
-            <a:r>
-              <a:t>without losing a single bit. Same hardware every time; only the control signals changed.</a:t>
+              <a:t>== SAY THIS (one line) ==</a:t>
+            </a:r>
+          </a:p>
+          <a:p>
+            <a:r>
+              <a:t>Registers are the fastest and smallest storage, because they are built from flip-flops.</a:t>
+            </a:r>
+          </a:p>
+          <a:p/>
+          <a:p>
+            <a:r>
+              <a:t>== FULL SCRIPT ==</a:t>
+            </a:r>
+          </a:p>
+          <a:p>
+            <a:r>
+              <a:t>- The bit in a register and the bit in main memory are logically the same, but physically very different.</a:t>
+            </a:r>
+          </a:p>
+          <a:p>
+            <a:r>
+              <a:t>- Registers sit inside the processor: a few dozen of them, read in under a nanosecond. Cache is next, kilobytes to megabytes at a few nanoseconds. Main memory is gigabytes but takes tens of nanoseconds, and a disk takes microseconds to milliseconds.</a:t>
+            </a:r>
+          </a:p>
+          <a:p>
+            <a:r>
+              <a:t>- Why not make everything registers? Because a flip-flop costs about six transistors per bit while a DRAM cell costs one transistor and a capacitor. You could never fit gigabytes that way.</a:t>
+            </a:r>
+          </a:p>
+          <a:p>
+            <a:r>
+              <a:t>- Now one worked example, all on the same eight flip-flops. R1 holds 0000 1101, which is 13.</a:t>
+            </a:r>
+          </a:p>
+          <a:p>
+            <a:r>
+              <a:t>- A load with 11010110 overwrites the whole word at once - that is the load enable doing its job. A left shift gives 0001 1010, which is 26: doubled. A right shift gives 0000 0110, which is 6: the half that did not fit is lost. A rotate gives 1000 0110, which is 134, and nothing was lost because the bit that left one end came back at the other.</a:t>
+            </a:r>
+          </a:p>
+          <a:p>
+            <a:r>
+              <a:t>- Same hardware every time. Only the control signals changed.</a:t>
+            </a:r>
+          </a:p>
+          <a:p/>
+          <a:p>
+            <a:r>
+              <a:t>== IF ASKED ==</a:t>
+            </a:r>
+          </a:p>
+          <a:p>
+            <a:r>
+              <a:t>If asked why 13/2 is 6 and not 6.5: shifting drops the remainder - it is integer division.</a:t>
             </a:r>
           </a:p>
         </p:txBody>
@@ -1269,37 +1348,64 @@
           <a:lstStyle/>
           <a:p>
             <a:r>
-              <a:t>To close. One: binary is not a convention, it is a hardware decision, and n bits give</a:t>
-            </a:r>
-          </a:p>
-          <a:p>
-            <a:r>
-              <a:t>two to the n patterns. Two: a bit survives because of a bistable circuit. Three: a</a:t>
-            </a:r>
-          </a:p>
-          <a:p>
-            <a:r>
-              <a:t>register is that circuit repeated n times with a common clock, so updates are atomic.</a:t>
-            </a:r>
-          </a:p>
-          <a:p>
-            <a:r>
-              <a:t>Four: control signals decide what happens - load to write, shift to move, tri-state to</a:t>
-            </a:r>
-          </a:p>
-          <a:p>
-            <a:r>
-              <a:t>share a bus. Five: that is exactly why the hierarchy looks the way it does.</a:t>
-            </a:r>
-          </a:p>
-          <a:p>
-            <a:r>
-              <a:t>On the right are the four questions I would expect, with short answers. Thank you -</a:t>
-            </a:r>
-          </a:p>
-          <a:p>
-            <a:r>
-              <a:t>I am happy to take questions.</a:t>
+              <a:t>== SAY THIS (one line) ==</a:t>
+            </a:r>
+          </a:p>
+          <a:p>
+            <a:r>
+              <a:t>Five sentences: binary, the bit cell, the register, the control signals, and the hierarchy.</a:t>
+            </a:r>
+          </a:p>
+          <a:p/>
+          <a:p>
+            <a:r>
+              <a:t>== FULL SCRIPT ==</a:t>
+            </a:r>
+          </a:p>
+          <a:p>
+            <a:r>
+              <a:t>- To finish, five sentences.</a:t>
+            </a:r>
+          </a:p>
+          <a:p>
+            <a:r>
+              <a:t>- One: binary is a hardware decision. Two states are cheap and reliable, and n bits give two to the power n values.</a:t>
+            </a:r>
+          </a:p>
+          <a:p>
+            <a:r>
+              <a:t>- Two: a bit is held by a circuit that can sit stably in one of two states - a flip-flop for speed, a capacitor for density.</a:t>
+            </a:r>
+          </a:p>
+          <a:p>
+            <a:r>
+              <a:t>- Three: a register is a row of those flip-flops on one clock, so a word is never read half-written.</a:t>
+            </a:r>
+          </a:p>
+          <a:p>
+            <a:r>
+              <a:t>- Four: control signals decide what happens - load to write, shift to move, tri-state enables to share one bus, one driver at a time.</a:t>
+            </a:r>
+          </a:p>
+          <a:p>
+            <a:r>
+              <a:t>- Five: that is exactly why the hierarchy looks the way it does - fast and tiny at the top, slow and huge at the bottom.</a:t>
+            </a:r>
+          </a:p>
+          <a:p>
+            <a:r>
+              <a:t>- On the right are the four questions I would expect, with short answers. Thank you - I am happy to take questions.</a:t>
+            </a:r>
+          </a:p>
+          <a:p/>
+          <a:p>
+            <a:r>
+              <a:t>== IF ASKED ==</a:t>
+            </a:r>
+          </a:p>
+          <a:p>
+            <a:r>
+              <a:t>No expected question on this slide.</a:t>
             </a:r>
           </a:p>
         </p:txBody>
@@ -5582,7 +5688,7 @@
         </p:nvSpPr>
         <p:spPr>
           <a:xfrm>
-            <a:off x="713232" y="2461895"/>
+            <a:off x="713232" y="2425319"/>
             <a:ext cx="10789920" cy="7315"/>
           </a:xfrm>
           <a:prstGeom prst="rect">
@@ -5626,7 +5732,7 @@
         </p:nvSpPr>
         <p:spPr>
           <a:xfrm>
-            <a:off x="713232" y="2589911"/>
+            <a:off x="713232" y="2535047"/>
             <a:ext cx="475488" cy="475488"/>
           </a:xfrm>
           <a:prstGeom prst="roundRect">
@@ -5672,7 +5778,7 @@
         </p:nvSpPr>
         <p:spPr>
           <a:xfrm>
-            <a:off x="713232" y="2699639"/>
+            <a:off x="713232" y="2644775"/>
             <a:ext cx="475488" cy="256032"/>
           </a:xfrm>
           <a:prstGeom prst="rect">
@@ -5714,7 +5820,7 @@
         </p:nvSpPr>
         <p:spPr>
           <a:xfrm>
-            <a:off x="1389888" y="2608199"/>
+            <a:off x="1389888" y="2553335"/>
             <a:ext cx="4160520" cy="292608"/>
           </a:xfrm>
           <a:prstGeom prst="rect">
@@ -5756,7 +5862,7 @@
         </p:nvSpPr>
         <p:spPr>
           <a:xfrm>
-            <a:off x="5806440" y="2644775"/>
+            <a:off x="5806440" y="2589911"/>
             <a:ext cx="5669280" cy="274320"/>
           </a:xfrm>
           <a:prstGeom prst="rect">
@@ -5798,7 +5904,7 @@
         </p:nvSpPr>
         <p:spPr>
           <a:xfrm>
-            <a:off x="713232" y="3193415"/>
+            <a:off x="713232" y="3101975"/>
             <a:ext cx="10789920" cy="7315"/>
           </a:xfrm>
           <a:prstGeom prst="rect">
@@ -5842,7 +5948,7 @@
         </p:nvSpPr>
         <p:spPr>
           <a:xfrm>
-            <a:off x="713232" y="3321431"/>
+            <a:off x="713232" y="3211703"/>
             <a:ext cx="475488" cy="475488"/>
           </a:xfrm>
           <a:prstGeom prst="roundRect">
@@ -5888,7 +5994,7 @@
         </p:nvSpPr>
         <p:spPr>
           <a:xfrm>
-            <a:off x="713232" y="3431159"/>
+            <a:off x="713232" y="3321431"/>
             <a:ext cx="475488" cy="256032"/>
           </a:xfrm>
           <a:prstGeom prst="rect">
@@ -5930,7 +6036,7 @@
         </p:nvSpPr>
         <p:spPr>
           <a:xfrm>
-            <a:off x="1389888" y="3339719"/>
+            <a:off x="1389888" y="3229991"/>
             <a:ext cx="4160520" cy="292608"/>
           </a:xfrm>
           <a:prstGeom prst="rect">
@@ -5972,7 +6078,7 @@
         </p:nvSpPr>
         <p:spPr>
           <a:xfrm>
-            <a:off x="5806440" y="3376295"/>
+            <a:off x="5806440" y="3266567"/>
             <a:ext cx="5669280" cy="274320"/>
           </a:xfrm>
           <a:prstGeom prst="rect">
@@ -6014,7 +6120,7 @@
         </p:nvSpPr>
         <p:spPr>
           <a:xfrm>
-            <a:off x="713232" y="3924935"/>
+            <a:off x="713232" y="3778631"/>
             <a:ext cx="10789920" cy="7315"/>
           </a:xfrm>
           <a:prstGeom prst="rect">
@@ -6058,7 +6164,7 @@
         </p:nvSpPr>
         <p:spPr>
           <a:xfrm>
-            <a:off x="713232" y="4052950"/>
+            <a:off x="713232" y="3888359"/>
             <a:ext cx="475488" cy="475488"/>
           </a:xfrm>
           <a:prstGeom prst="roundRect">
@@ -6104,7 +6210,7 @@
         </p:nvSpPr>
         <p:spPr>
           <a:xfrm>
-            <a:off x="713232" y="4162679"/>
+            <a:off x="713232" y="3998087"/>
             <a:ext cx="475488" cy="256032"/>
           </a:xfrm>
           <a:prstGeom prst="rect">
@@ -6146,7 +6252,7 @@
         </p:nvSpPr>
         <p:spPr>
           <a:xfrm>
-            <a:off x="1389888" y="4071239"/>
+            <a:off x="1389888" y="3906647"/>
             <a:ext cx="4160520" cy="292608"/>
           </a:xfrm>
           <a:prstGeom prst="rect">
@@ -6188,7 +6294,7 @@
         </p:nvSpPr>
         <p:spPr>
           <a:xfrm>
-            <a:off x="5806440" y="4107815"/>
+            <a:off x="5806440" y="3943223"/>
             <a:ext cx="5669280" cy="274320"/>
           </a:xfrm>
           <a:prstGeom prst="rect">
@@ -6230,7 +6336,7 @@
         </p:nvSpPr>
         <p:spPr>
           <a:xfrm>
-            <a:off x="713232" y="4656455"/>
+            <a:off x="713232" y="4455287"/>
             <a:ext cx="10789920" cy="7315"/>
           </a:xfrm>
           <a:prstGeom prst="rect">
@@ -6274,7 +6380,7 @@
         </p:nvSpPr>
         <p:spPr>
           <a:xfrm>
-            <a:off x="713232" y="4784470"/>
+            <a:off x="713232" y="4565015"/>
             <a:ext cx="475488" cy="475488"/>
           </a:xfrm>
           <a:prstGeom prst="roundRect">
@@ -6320,7 +6426,7 @@
         </p:nvSpPr>
         <p:spPr>
           <a:xfrm>
-            <a:off x="713232" y="4894199"/>
+            <a:off x="713232" y="4674743"/>
             <a:ext cx="475488" cy="256032"/>
           </a:xfrm>
           <a:prstGeom prst="rect">
@@ -6362,7 +6468,7 @@
         </p:nvSpPr>
         <p:spPr>
           <a:xfrm>
-            <a:off x="1389888" y="4802759"/>
+            <a:off x="1389888" y="4583303"/>
             <a:ext cx="4160520" cy="292608"/>
           </a:xfrm>
           <a:prstGeom prst="rect">
@@ -6404,7 +6510,7 @@
         </p:nvSpPr>
         <p:spPr>
           <a:xfrm>
-            <a:off x="5806440" y="4839335"/>
+            <a:off x="5806440" y="4619879"/>
             <a:ext cx="5669280" cy="274320"/>
           </a:xfrm>
           <a:prstGeom prst="rect">
@@ -6446,7 +6552,7 @@
         </p:nvSpPr>
         <p:spPr>
           <a:xfrm>
-            <a:off x="713232" y="5387975"/>
+            <a:off x="713232" y="5131943"/>
             <a:ext cx="10789920" cy="7315"/>
           </a:xfrm>
           <a:prstGeom prst="rect">
@@ -6490,7 +6596,7 @@
         </p:nvSpPr>
         <p:spPr>
           <a:xfrm>
-            <a:off x="713232" y="5515990"/>
+            <a:off x="713232" y="5241671"/>
             <a:ext cx="475488" cy="475488"/>
           </a:xfrm>
           <a:prstGeom prst="roundRect">
@@ -6536,7 +6642,7 @@
         </p:nvSpPr>
         <p:spPr>
           <a:xfrm>
-            <a:off x="713232" y="5625718"/>
+            <a:off x="713232" y="5351399"/>
             <a:ext cx="475488" cy="256032"/>
           </a:xfrm>
           <a:prstGeom prst="rect">
@@ -6578,7 +6684,7 @@
         </p:nvSpPr>
         <p:spPr>
           <a:xfrm>
-            <a:off x="1389888" y="5534279"/>
+            <a:off x="1389888" y="5259959"/>
             <a:ext cx="4160520" cy="292608"/>
           </a:xfrm>
           <a:prstGeom prst="rect">
@@ -6620,7 +6726,7 @@
         </p:nvSpPr>
         <p:spPr>
           <a:xfrm>
-            <a:off x="5806440" y="5570855"/>
+            <a:off x="5806440" y="5296535"/>
             <a:ext cx="5669280" cy="274320"/>
           </a:xfrm>
           <a:prstGeom prst="rect">
@@ -6657,6 +6763,148 @@
       <p:sp>
         <p:nvSpPr>
           <p:cNvPr id="35" name="Rectangle 34"/>
+          <p:cNvSpPr/>
+          <p:nvPr/>
+        </p:nvSpPr>
+        <p:spPr>
+          <a:xfrm>
+            <a:off x="685800" y="5632704"/>
+            <a:ext cx="10835640" cy="475488"/>
+          </a:xfrm>
+          <a:prstGeom prst="rect">
+            <a:avLst/>
+          </a:prstGeom>
+          <a:solidFill>
+            <a:srgbClr val="E8F3F1"/>
+          </a:solidFill>
+          <a:ln>
+            <a:noFill/>
+          </a:ln>
+          <a:effectLst/>
+        </p:spPr>
+        <p:style>
+          <a:lnRef idx="1">
+            <a:schemeClr val="accent1"/>
+          </a:lnRef>
+          <a:fillRef idx="3">
+            <a:schemeClr val="accent1"/>
+          </a:fillRef>
+          <a:effectRef idx="2">
+            <a:schemeClr val="accent1"/>
+          </a:effectRef>
+          <a:fontRef idx="minor">
+            <a:schemeClr val="lt1"/>
+          </a:fontRef>
+        </p:style>
+        <p:txBody>
+          <a:bodyPr rtlCol="0" anchor="ctr" wrap="square"/>
+          <a:lstStyle/>
+          <a:p>
+            <a:pPr algn="ctr"/>
+          </a:p>
+        </p:txBody>
+      </p:sp>
+      <p:sp>
+        <p:nvSpPr>
+          <p:cNvPr id="36" name="Rectangle 35"/>
+          <p:cNvSpPr/>
+          <p:nvPr/>
+        </p:nvSpPr>
+        <p:spPr>
+          <a:xfrm>
+            <a:off x="685800" y="5632704"/>
+            <a:ext cx="50292" cy="475488"/>
+          </a:xfrm>
+          <a:prstGeom prst="rect">
+            <a:avLst/>
+          </a:prstGeom>
+          <a:solidFill>
+            <a:srgbClr val="0E7C86"/>
+          </a:solidFill>
+          <a:ln>
+            <a:noFill/>
+          </a:ln>
+          <a:effectLst/>
+        </p:spPr>
+        <p:style>
+          <a:lnRef idx="1">
+            <a:schemeClr val="accent1"/>
+          </a:lnRef>
+          <a:fillRef idx="3">
+            <a:schemeClr val="accent1"/>
+          </a:fillRef>
+          <a:effectRef idx="2">
+            <a:schemeClr val="accent1"/>
+          </a:effectRef>
+          <a:fontRef idx="minor">
+            <a:schemeClr val="lt1"/>
+          </a:fontRef>
+        </p:style>
+        <p:txBody>
+          <a:bodyPr rtlCol="0" anchor="ctr" wrap="square"/>
+          <a:lstStyle/>
+          <a:p>
+            <a:pPr algn="ctr"/>
+          </a:p>
+        </p:txBody>
+      </p:sp>
+      <p:sp>
+        <p:nvSpPr>
+          <p:cNvPr id="37" name="TextBox 36"/>
+          <p:cNvSpPr txBox="1"/>
+          <p:nvPr/>
+        </p:nvSpPr>
+        <p:spPr>
+          <a:xfrm>
+            <a:off x="886968" y="5715000"/>
+            <a:ext cx="10451592" cy="310896"/>
+          </a:xfrm>
+          <a:prstGeom prst="rect">
+            <a:avLst/>
+          </a:prstGeom>
+          <a:noFill/>
+        </p:spPr>
+        <p:txBody>
+          <a:bodyPr wrap="square" lIns="0" rIns="0" tIns="0" bIns="0" anchor="t">
+            <a:spAutoFit/>
+          </a:bodyPr>
+          <a:lstStyle/>
+          <a:p>
+            <a:pPr algn="l">
+              <a:lnSpc>
+                <a:spcPct val="106000"/>
+              </a:lnSpc>
+              <a:spcBef>
+                <a:spcPts val="0"/>
+              </a:spcBef>
+              <a:spcAft>
+                <a:spcPts val="0"/>
+              </a:spcAft>
+            </a:pPr>
+            <a:r>
+              <a:rPr sz="1050" b="1" i="0">
+                <a:solidFill>
+                  <a:srgbClr val="0A5A62"/>
+                </a:solidFill>
+                <a:latin typeface="Segoe UI"/>
+              </a:rPr>
+              <a:t>SAY THIS:  </a:t>
+            </a:r>
+            <a:r>
+              <a:rPr sz="1250" b="0" i="0">
+                <a:solidFill>
+                  <a:srgbClr val="11212E"/>
+                </a:solidFill>
+                <a:latin typeface="Segoe UI"/>
+              </a:rPr>
+              <a:t>Six short steps, and each one uses the step before it.</a:t>
+            </a:r>
+          </a:p>
+        </p:txBody>
+      </p:sp>
+      <p:sp>
+        <p:nvSpPr>
+          <p:cNvPr id="38" name="Rectangle 37"/>
           <p:cNvSpPr/>
           <p:nvPr/>
         </p:nvSpPr>
@@ -6700,7 +6948,7 @@
       </p:sp>
       <p:sp>
         <p:nvSpPr>
-          <p:cNvPr id="36" name="TextBox 35"/>
+          <p:cNvPr id="39" name="TextBox 38"/>
           <p:cNvSpPr txBox="1"/>
           <p:nvPr/>
         </p:nvSpPr>
@@ -6742,7 +6990,7 @@
       </p:sp>
       <p:sp>
         <p:nvSpPr>
-          <p:cNvPr id="37" name="TextBox 36"/>
+          <p:cNvPr id="40" name="TextBox 39"/>
           <p:cNvSpPr txBox="1"/>
           <p:nvPr/>
         </p:nvSpPr>
@@ -7028,8 +7276,8 @@
         </p:nvSpPr>
         <p:spPr>
           <a:xfrm>
-            <a:off x="685800" y="2132711"/>
-            <a:ext cx="420624" cy="420624"/>
+            <a:off x="685800" y="2096135"/>
+            <a:ext cx="402336" cy="402336"/>
           </a:xfrm>
           <a:prstGeom prst="rect">
             <a:avLst/>
@@ -7074,8 +7322,8 @@
         </p:nvSpPr>
         <p:spPr>
           <a:xfrm>
-            <a:off x="685800" y="2215007"/>
-            <a:ext cx="420624" cy="256032"/>
+            <a:off x="685800" y="2178431"/>
+            <a:ext cx="402336" cy="256032"/>
           </a:xfrm>
           <a:prstGeom prst="rect">
             <a:avLst/>
@@ -7097,7 +7345,7 @@
               </a:spcAft>
             </a:pPr>
             <a:r>
-              <a:rPr sz="1500" b="1" i="0">
+              <a:rPr sz="1400" b="1" i="0">
                 <a:solidFill>
                   <a:srgbClr val="FFFFFF"/>
                 </a:solidFill>
@@ -7116,8 +7364,8 @@
         </p:nvSpPr>
         <p:spPr>
           <a:xfrm>
-            <a:off x="1106424" y="2132711"/>
-            <a:ext cx="420624" cy="420624"/>
+            <a:off x="1088136" y="2096135"/>
+            <a:ext cx="402336" cy="402336"/>
           </a:xfrm>
           <a:prstGeom prst="rect">
             <a:avLst/>
@@ -7162,8 +7410,8 @@
         </p:nvSpPr>
         <p:spPr>
           <a:xfrm>
-            <a:off x="1106424" y="2215007"/>
-            <a:ext cx="420624" cy="256032"/>
+            <a:off x="1088136" y="2178431"/>
+            <a:ext cx="402336" cy="256032"/>
           </a:xfrm>
           <a:prstGeom prst="rect">
             <a:avLst/>
@@ -7185,7 +7433,7 @@
               </a:spcAft>
             </a:pPr>
             <a:r>
-              <a:rPr sz="1500" b="1" i="0">
+              <a:rPr sz="1400" b="1" i="0">
                 <a:solidFill>
                   <a:srgbClr val="4A5A69"/>
                 </a:solidFill>
@@ -7204,8 +7452,8 @@
         </p:nvSpPr>
         <p:spPr>
           <a:xfrm>
-            <a:off x="1527048" y="2132711"/>
-            <a:ext cx="420624" cy="420624"/>
+            <a:off x="1490472" y="2096135"/>
+            <a:ext cx="402336" cy="402336"/>
           </a:xfrm>
           <a:prstGeom prst="rect">
             <a:avLst/>
@@ -7250,8 +7498,8 @@
         </p:nvSpPr>
         <p:spPr>
           <a:xfrm>
-            <a:off x="1527048" y="2215007"/>
-            <a:ext cx="420624" cy="256032"/>
+            <a:off x="1490472" y="2178431"/>
+            <a:ext cx="402336" cy="256032"/>
           </a:xfrm>
           <a:prstGeom prst="rect">
             <a:avLst/>
@@ -7273,7 +7521,7 @@
               </a:spcAft>
             </a:pPr>
             <a:r>
-              <a:rPr sz="1500" b="1" i="0">
+              <a:rPr sz="1400" b="1" i="0">
                 <a:solidFill>
                   <a:srgbClr val="FFFFFF"/>
                 </a:solidFill>
@@ -7292,8 +7540,8 @@
         </p:nvSpPr>
         <p:spPr>
           <a:xfrm>
-            <a:off x="1947672" y="2132711"/>
-            <a:ext cx="420624" cy="420624"/>
+            <a:off x="1892808" y="2096135"/>
+            <a:ext cx="402336" cy="402336"/>
           </a:xfrm>
           <a:prstGeom prst="rect">
             <a:avLst/>
@@ -7338,8 +7586,8 @@
         </p:nvSpPr>
         <p:spPr>
           <a:xfrm>
-            <a:off x="1947672" y="2215007"/>
-            <a:ext cx="420624" cy="256032"/>
+            <a:off x="1892808" y="2178431"/>
+            <a:ext cx="402336" cy="256032"/>
           </a:xfrm>
           <a:prstGeom prst="rect">
             <a:avLst/>
@@ -7361,7 +7609,7 @@
               </a:spcAft>
             </a:pPr>
             <a:r>
-              <a:rPr sz="1500" b="1" i="0">
+              <a:rPr sz="1400" b="1" i="0">
                 <a:solidFill>
                   <a:srgbClr val="FFFFFF"/>
                 </a:solidFill>
@@ -7380,8 +7628,8 @@
         </p:nvSpPr>
         <p:spPr>
           <a:xfrm>
-            <a:off x="2368296" y="2132711"/>
-            <a:ext cx="420624" cy="420624"/>
+            <a:off x="2295144" y="2096135"/>
+            <a:ext cx="402336" cy="402336"/>
           </a:xfrm>
           <a:prstGeom prst="rect">
             <a:avLst/>
@@ -7426,8 +7674,8 @@
         </p:nvSpPr>
         <p:spPr>
           <a:xfrm>
-            <a:off x="2368296" y="2215007"/>
-            <a:ext cx="420624" cy="256032"/>
+            <a:off x="2295144" y="2178431"/>
+            <a:ext cx="402336" cy="256032"/>
           </a:xfrm>
           <a:prstGeom prst="rect">
             <a:avLst/>
@@ -7449,7 +7697,7 @@
               </a:spcAft>
             </a:pPr>
             <a:r>
-              <a:rPr sz="1500" b="1" i="0">
+              <a:rPr sz="1400" b="1" i="0">
                 <a:solidFill>
                   <a:srgbClr val="4A5A69"/>
                 </a:solidFill>
@@ -7468,8 +7716,8 @@
         </p:nvSpPr>
         <p:spPr>
           <a:xfrm>
-            <a:off x="2788920" y="2132711"/>
-            <a:ext cx="420624" cy="420624"/>
+            <a:off x="2697480" y="2096135"/>
+            <a:ext cx="402336" cy="402336"/>
           </a:xfrm>
           <a:prstGeom prst="rect">
             <a:avLst/>
@@ -7514,8 +7762,8 @@
         </p:nvSpPr>
         <p:spPr>
           <a:xfrm>
-            <a:off x="2788920" y="2215007"/>
-            <a:ext cx="420624" cy="256032"/>
+            <a:off x="2697480" y="2178431"/>
+            <a:ext cx="402336" cy="256032"/>
           </a:xfrm>
           <a:prstGeom prst="rect">
             <a:avLst/>
@@ -7537,7 +7785,7 @@
               </a:spcAft>
             </a:pPr>
             <a:r>
-              <a:rPr sz="1500" b="1" i="0">
+              <a:rPr sz="1400" b="1" i="0">
                 <a:solidFill>
                   <a:srgbClr val="FFFFFF"/>
                 </a:solidFill>
@@ -7556,8 +7804,8 @@
         </p:nvSpPr>
         <p:spPr>
           <a:xfrm>
-            <a:off x="3209544" y="2132711"/>
-            <a:ext cx="420624" cy="420624"/>
+            <a:off x="3099816" y="2096135"/>
+            <a:ext cx="402336" cy="402336"/>
           </a:xfrm>
           <a:prstGeom prst="rect">
             <a:avLst/>
@@ -7602,8 +7850,8 @@
         </p:nvSpPr>
         <p:spPr>
           <a:xfrm>
-            <a:off x="3209544" y="2215007"/>
-            <a:ext cx="420624" cy="256032"/>
+            <a:off x="3099816" y="2178431"/>
+            <a:ext cx="402336" cy="256032"/>
           </a:xfrm>
           <a:prstGeom prst="rect">
             <a:avLst/>
@@ -7625,7 +7873,7 @@
               </a:spcAft>
             </a:pPr>
             <a:r>
-              <a:rPr sz="1500" b="1" i="0">
+              <a:rPr sz="1400" b="1" i="0">
                 <a:solidFill>
                   <a:srgbClr val="4A5A69"/>
                 </a:solidFill>
@@ -7644,8 +7892,8 @@
         </p:nvSpPr>
         <p:spPr>
           <a:xfrm>
-            <a:off x="3630168" y="2132711"/>
-            <a:ext cx="420624" cy="420624"/>
+            <a:off x="3502152" y="2096135"/>
+            <a:ext cx="402336" cy="402336"/>
           </a:xfrm>
           <a:prstGeom prst="rect">
             <a:avLst/>
@@ -7690,8 +7938,8 @@
         </p:nvSpPr>
         <p:spPr>
           <a:xfrm>
-            <a:off x="3630168" y="2215007"/>
-            <a:ext cx="420624" cy="256032"/>
+            <a:off x="3502152" y="2178431"/>
+            <a:ext cx="402336" cy="256032"/>
           </a:xfrm>
           <a:prstGeom prst="rect">
             <a:avLst/>
@@ -7713,7 +7961,7 @@
               </a:spcAft>
             </a:pPr>
             <a:r>
-              <a:rPr sz="1500" b="1" i="0">
+              <a:rPr sz="1400" b="1" i="0">
                 <a:solidFill>
                   <a:srgbClr val="4A5A69"/>
                 </a:solidFill>
@@ -7732,8 +7980,8 @@
         </p:nvSpPr>
         <p:spPr>
           <a:xfrm>
-            <a:off x="685800" y="2599055"/>
-            <a:ext cx="420624" cy="201168"/>
+            <a:off x="685800" y="2544190"/>
+            <a:ext cx="402336" cy="201168"/>
           </a:xfrm>
           <a:prstGeom prst="rect">
             <a:avLst/>
@@ -7774,8 +8022,8 @@
         </p:nvSpPr>
         <p:spPr>
           <a:xfrm>
-            <a:off x="1106424" y="2599055"/>
-            <a:ext cx="420624" cy="201168"/>
+            <a:off x="1088136" y="2544190"/>
+            <a:ext cx="402336" cy="201168"/>
           </a:xfrm>
           <a:prstGeom prst="rect">
             <a:avLst/>
@@ -7816,8 +8064,8 @@
         </p:nvSpPr>
         <p:spPr>
           <a:xfrm>
-            <a:off x="1527048" y="2599055"/>
-            <a:ext cx="420624" cy="201168"/>
+            <a:off x="1490472" y="2544190"/>
+            <a:ext cx="402336" cy="201168"/>
           </a:xfrm>
           <a:prstGeom prst="rect">
             <a:avLst/>
@@ -7858,8 +8106,8 @@
         </p:nvSpPr>
         <p:spPr>
           <a:xfrm>
-            <a:off x="1947672" y="2599055"/>
-            <a:ext cx="420624" cy="201168"/>
+            <a:off x="1892808" y="2544190"/>
+            <a:ext cx="402336" cy="201168"/>
           </a:xfrm>
           <a:prstGeom prst="rect">
             <a:avLst/>
@@ -7900,8 +8148,8 @@
         </p:nvSpPr>
         <p:spPr>
           <a:xfrm>
-            <a:off x="2368296" y="2599055"/>
-            <a:ext cx="420624" cy="201168"/>
+            <a:off x="2295144" y="2544190"/>
+            <a:ext cx="402336" cy="201168"/>
           </a:xfrm>
           <a:prstGeom prst="rect">
             <a:avLst/>
@@ -7942,8 +8190,8 @@
         </p:nvSpPr>
         <p:spPr>
           <a:xfrm>
-            <a:off x="2788920" y="2599055"/>
-            <a:ext cx="420624" cy="201168"/>
+            <a:off x="2697480" y="2544190"/>
+            <a:ext cx="402336" cy="201168"/>
           </a:xfrm>
           <a:prstGeom prst="rect">
             <a:avLst/>
@@ -7984,8 +8232,8 @@
         </p:nvSpPr>
         <p:spPr>
           <a:xfrm>
-            <a:off x="3209544" y="2599055"/>
-            <a:ext cx="420624" cy="201168"/>
+            <a:off x="3099816" y="2544190"/>
+            <a:ext cx="402336" cy="201168"/>
           </a:xfrm>
           <a:prstGeom prst="rect">
             <a:avLst/>
@@ -8026,8 +8274,8 @@
         </p:nvSpPr>
         <p:spPr>
           <a:xfrm>
-            <a:off x="3630168" y="2599055"/>
-            <a:ext cx="420624" cy="201168"/>
+            <a:off x="3502152" y="2544190"/>
+            <a:ext cx="402336" cy="201168"/>
           </a:xfrm>
           <a:prstGeom prst="rect">
             <a:avLst/>
@@ -8068,7 +8316,7 @@
         </p:nvSpPr>
         <p:spPr>
           <a:xfrm>
-            <a:off x="685800" y="2699639"/>
+            <a:off x="685800" y="2608199"/>
             <a:ext cx="4023360" cy="219456"/>
           </a:xfrm>
           <a:prstGeom prst="rect">
@@ -8110,7 +8358,7 @@
         </p:nvSpPr>
         <p:spPr>
           <a:xfrm>
-            <a:off x="685800" y="3028823"/>
+            <a:off x="685800" y="3065399"/>
             <a:ext cx="5257800" cy="237744"/>
           </a:xfrm>
           <a:prstGeom prst="rect">
@@ -8152,8 +8400,8 @@
         </p:nvSpPr>
         <p:spPr>
           <a:xfrm>
-            <a:off x="685800" y="3284855"/>
-            <a:ext cx="5257800" cy="566928"/>
+            <a:off x="685800" y="3321431"/>
+            <a:ext cx="5257800" cy="365760"/>
           </a:xfrm>
           <a:prstGeom prst="rect">
             <a:avLst/>
@@ -8212,8 +8460,8 @@
         </p:nvSpPr>
         <p:spPr>
           <a:xfrm>
-            <a:off x="685800" y="3796918"/>
-            <a:ext cx="5257800" cy="502920"/>
+            <a:off x="685800" y="3705479"/>
+            <a:ext cx="5257800" cy="402336"/>
           </a:xfrm>
           <a:prstGeom prst="rect">
             <a:avLst/>
@@ -8228,7 +8476,7 @@
           <a:p>
             <a:pPr algn="l">
               <a:lnSpc>
-                <a:spcPct val="112000"/>
+                <a:spcPct val="110000"/>
               </a:lnSpc>
               <a:spcBef>
                 <a:spcPts val="0"/>
@@ -8238,13 +8486,13 @@
               </a:spcAft>
             </a:pPr>
             <a:r>
-              <a:rPr sz="1050" b="0" i="0">
+              <a:rPr sz="1000" b="0" i="0">
                 <a:solidFill>
                   <a:srgbClr val="788897"/>
                 </a:solidFill>
                 <a:latin typeface="Segoe UI"/>
               </a:rPr>
-              <a:t>A 0 or 1 is a voltage range, not an exact level: below ~0.8 V reads 0, above ~2.0 V reads 1, so small noise changes nothing.</a:t>
+              <a:t>A 0 or 1 is a voltage range, not an exact level, so small electrical noise cannot change it.</a:t>
             </a:r>
           </a:p>
         </p:txBody>
@@ -8258,8 +8506,8 @@
           <p:nvPr/>
         </p:nvGraphicFramePr>
         <p:xfrm>
-          <a:off x="685800" y="4400423"/>
-          <a:ext cx="5257800" cy="1531620"/>
+          <a:off x="685800" y="4180966"/>
+          <a:ext cx="5257800" cy="1417320"/>
         </p:xfrm>
         <a:graphic>
           <a:graphicData uri="http://schemas.openxmlformats.org/drawingml/2006/table">
@@ -8273,7 +8521,7 @@
                 <a:gridCol w="1691640"/>
                 <a:gridCol w="1609344"/>
               </a:tblGrid>
-              <a:tr h="306324">
+              <a:tr h="283464">
                 <a:tc>
                   <a:txBody>
                     <a:bodyPr wrap="square"/>
@@ -8367,7 +8615,7 @@
                   </a:tcPr>
                 </a:tc>
               </a:tr>
-              <a:tr h="306324">
+              <a:tr h="283464">
                 <a:tc>
                   <a:txBody>
                     <a:bodyPr wrap="square"/>
@@ -8461,7 +8709,7 @@
                   </a:tcPr>
                 </a:tc>
               </a:tr>
-              <a:tr h="306324">
+              <a:tr h="283464">
                 <a:tc>
                   <a:txBody>
                     <a:bodyPr wrap="square"/>
@@ -8555,7 +8803,7 @@
                   </a:tcPr>
                 </a:tc>
               </a:tr>
-              <a:tr h="306324">
+              <a:tr h="283464">
                 <a:tc>
                   <a:txBody>
                     <a:bodyPr wrap="square"/>
@@ -8649,7 +8897,7 @@
                   </a:tcPr>
                 </a:tc>
               </a:tr>
-              <a:tr h="306324">
+              <a:tr h="283464">
                 <a:tc>
                   <a:txBody>
                     <a:bodyPr wrap="square"/>
@@ -8799,7 +9047,7 @@
         </p:nvGraphicFramePr>
         <p:xfrm>
           <a:off x="6355080" y="2114423"/>
-          <a:ext cx="5120640" cy="1783080"/>
+          <a:ext cx="5120640" cy="1700784"/>
         </p:xfrm>
         <a:graphic>
           <a:graphicData uri="http://schemas.openxmlformats.org/drawingml/2006/table">
@@ -8813,7 +9061,7 @@
                 <a:gridCol w="1691640"/>
                 <a:gridCol w="1581912"/>
               </a:tblGrid>
-              <a:tr h="297180">
+              <a:tr h="283464">
                 <a:tc>
                   <a:txBody>
                     <a:bodyPr wrap="square"/>
@@ -8907,7 +9155,7 @@
                   </a:tcPr>
                 </a:tc>
               </a:tr>
-              <a:tr h="297180">
+              <a:tr h="283464">
                 <a:tc>
                   <a:txBody>
                     <a:bodyPr wrap="square"/>
@@ -9001,7 +9249,7 @@
                   </a:tcPr>
                 </a:tc>
               </a:tr>
-              <a:tr h="297180">
+              <a:tr h="283464">
                 <a:tc>
                   <a:txBody>
                     <a:bodyPr wrap="square"/>
@@ -9095,7 +9343,7 @@
                   </a:tcPr>
                 </a:tc>
               </a:tr>
-              <a:tr h="297180">
+              <a:tr h="283464">
                 <a:tc>
                   <a:txBody>
                     <a:bodyPr wrap="square"/>
@@ -9189,7 +9437,7 @@
                   </a:tcPr>
                 </a:tc>
               </a:tr>
-              <a:tr h="297180">
+              <a:tr h="283464">
                 <a:tc>
                   <a:txBody>
                     <a:bodyPr wrap="square"/>
@@ -9283,7 +9531,7 @@
                   </a:tcPr>
                 </a:tc>
               </a:tr>
-              <a:tr h="297180">
+              <a:tr h="283464">
                 <a:tc>
                   <a:txBody>
                     <a:bodyPr wrap="square"/>
@@ -9389,7 +9637,7 @@
         </p:nvSpPr>
         <p:spPr>
           <a:xfrm>
-            <a:off x="6355080" y="3961511"/>
+            <a:off x="6355080" y="3851783"/>
             <a:ext cx="5120640" cy="256032"/>
           </a:xfrm>
           <a:prstGeom prst="rect">
@@ -9431,8 +9679,8 @@
         </p:nvSpPr>
         <p:spPr>
           <a:xfrm>
-            <a:off x="6355080" y="4308983"/>
-            <a:ext cx="1197864" cy="859536"/>
+            <a:off x="6355080" y="4199255"/>
+            <a:ext cx="1197864" cy="822960"/>
           </a:xfrm>
           <a:prstGeom prst="roundRect">
             <a:avLst>
@@ -9479,7 +9727,7 @@
         </p:nvSpPr>
         <p:spPr>
           <a:xfrm>
-            <a:off x="6355080" y="4400423"/>
+            <a:off x="6355080" y="4290695"/>
             <a:ext cx="1197864" cy="237744"/>
           </a:xfrm>
           <a:prstGeom prst="rect">
@@ -9521,7 +9769,7 @@
         </p:nvSpPr>
         <p:spPr>
           <a:xfrm>
-            <a:off x="6355080" y="4638166"/>
+            <a:off x="6355080" y="4528439"/>
             <a:ext cx="1197864" cy="219456"/>
           </a:xfrm>
           <a:prstGeom prst="rect">
@@ -9563,7 +9811,7 @@
         </p:nvSpPr>
         <p:spPr>
           <a:xfrm>
-            <a:off x="6400800" y="4875911"/>
+            <a:off x="6400800" y="4747895"/>
             <a:ext cx="1106424" cy="219456"/>
           </a:xfrm>
           <a:prstGeom prst="rect">
@@ -9605,8 +9853,8 @@
         </p:nvSpPr>
         <p:spPr>
           <a:xfrm>
-            <a:off x="7662672" y="4308983"/>
-            <a:ext cx="1197864" cy="859536"/>
+            <a:off x="7662672" y="4199255"/>
+            <a:ext cx="1197864" cy="822960"/>
           </a:xfrm>
           <a:prstGeom prst="roundRect">
             <a:avLst>
@@ -9653,7 +9901,7 @@
         </p:nvSpPr>
         <p:spPr>
           <a:xfrm>
-            <a:off x="7662672" y="4400423"/>
+            <a:off x="7662672" y="4290695"/>
             <a:ext cx="1197864" cy="237744"/>
           </a:xfrm>
           <a:prstGeom prst="rect">
@@ -9695,7 +9943,7 @@
         </p:nvSpPr>
         <p:spPr>
           <a:xfrm>
-            <a:off x="7662672" y="4638166"/>
+            <a:off x="7662672" y="4528439"/>
             <a:ext cx="1197864" cy="219456"/>
           </a:xfrm>
           <a:prstGeom prst="rect">
@@ -9737,7 +9985,7 @@
         </p:nvSpPr>
         <p:spPr>
           <a:xfrm>
-            <a:off x="7708392" y="4875911"/>
+            <a:off x="7708392" y="4747895"/>
             <a:ext cx="1106424" cy="219456"/>
           </a:xfrm>
           <a:prstGeom prst="rect">
@@ -9779,8 +10027,8 @@
         </p:nvSpPr>
         <p:spPr>
           <a:xfrm>
-            <a:off x="8970264" y="4308983"/>
-            <a:ext cx="1197864" cy="859536"/>
+            <a:off x="8970264" y="4199255"/>
+            <a:ext cx="1197864" cy="822960"/>
           </a:xfrm>
           <a:prstGeom prst="roundRect">
             <a:avLst>
@@ -9827,7 +10075,7 @@
         </p:nvSpPr>
         <p:spPr>
           <a:xfrm>
-            <a:off x="8970264" y="4400423"/>
+            <a:off x="8970264" y="4290695"/>
             <a:ext cx="1197864" cy="237744"/>
           </a:xfrm>
           <a:prstGeom prst="rect">
@@ -9869,7 +10117,7 @@
         </p:nvSpPr>
         <p:spPr>
           <a:xfrm>
-            <a:off x="8970264" y="4638166"/>
+            <a:off x="8970264" y="4528439"/>
             <a:ext cx="1197864" cy="219456"/>
           </a:xfrm>
           <a:prstGeom prst="rect">
@@ -9911,7 +10159,7 @@
         </p:nvSpPr>
         <p:spPr>
           <a:xfrm>
-            <a:off x="9015984" y="4875911"/>
+            <a:off x="9015984" y="4747895"/>
             <a:ext cx="1106424" cy="219456"/>
           </a:xfrm>
           <a:prstGeom prst="rect">
@@ -9953,8 +10201,8 @@
         </p:nvSpPr>
         <p:spPr>
           <a:xfrm>
-            <a:off x="10277856" y="4308983"/>
-            <a:ext cx="1197864" cy="859536"/>
+            <a:off x="10277856" y="4199255"/>
+            <a:ext cx="1197864" cy="822960"/>
           </a:xfrm>
           <a:prstGeom prst="roundRect">
             <a:avLst>
@@ -10001,7 +10249,7 @@
         </p:nvSpPr>
         <p:spPr>
           <a:xfrm>
-            <a:off x="10277856" y="4400423"/>
+            <a:off x="10277856" y="4290695"/>
             <a:ext cx="1197864" cy="237744"/>
           </a:xfrm>
           <a:prstGeom prst="rect">
@@ -10043,7 +10291,7 @@
         </p:nvSpPr>
         <p:spPr>
           <a:xfrm>
-            <a:off x="10277856" y="4638166"/>
+            <a:off x="10277856" y="4528439"/>
             <a:ext cx="1197864" cy="219456"/>
           </a:xfrm>
           <a:prstGeom prst="rect">
@@ -10085,7 +10333,7 @@
         </p:nvSpPr>
         <p:spPr>
           <a:xfrm>
-            <a:off x="10323576" y="4875911"/>
+            <a:off x="10323576" y="4747895"/>
             <a:ext cx="1106424" cy="219456"/>
           </a:xfrm>
           <a:prstGeom prst="rect">
@@ -10127,8 +10375,8 @@
         </p:nvSpPr>
         <p:spPr>
           <a:xfrm>
-            <a:off x="6355080" y="5314823"/>
-            <a:ext cx="5120640" cy="475488"/>
+            <a:off x="6355080" y="5131943"/>
+            <a:ext cx="5120640" cy="402336"/>
           </a:xfrm>
           <a:prstGeom prst="rect">
             <a:avLst/>
@@ -10176,6 +10424,148 @@
       <p:sp>
         <p:nvSpPr>
           <p:cNvPr id="56" name="Rectangle 55"/>
+          <p:cNvSpPr/>
+          <p:nvPr/>
+        </p:nvSpPr>
+        <p:spPr>
+          <a:xfrm>
+            <a:off x="685800" y="5632704"/>
+            <a:ext cx="10835640" cy="475488"/>
+          </a:xfrm>
+          <a:prstGeom prst="rect">
+            <a:avLst/>
+          </a:prstGeom>
+          <a:solidFill>
+            <a:srgbClr val="E8F3F1"/>
+          </a:solidFill>
+          <a:ln>
+            <a:noFill/>
+          </a:ln>
+          <a:effectLst/>
+        </p:spPr>
+        <p:style>
+          <a:lnRef idx="1">
+            <a:schemeClr val="accent1"/>
+          </a:lnRef>
+          <a:fillRef idx="3">
+            <a:schemeClr val="accent1"/>
+          </a:fillRef>
+          <a:effectRef idx="2">
+            <a:schemeClr val="accent1"/>
+          </a:effectRef>
+          <a:fontRef idx="minor">
+            <a:schemeClr val="lt1"/>
+          </a:fontRef>
+        </p:style>
+        <p:txBody>
+          <a:bodyPr rtlCol="0" anchor="ctr" wrap="square"/>
+          <a:lstStyle/>
+          <a:p>
+            <a:pPr algn="ctr"/>
+          </a:p>
+        </p:txBody>
+      </p:sp>
+      <p:sp>
+        <p:nvSpPr>
+          <p:cNvPr id="57" name="Rectangle 56"/>
+          <p:cNvSpPr/>
+          <p:nvPr/>
+        </p:nvSpPr>
+        <p:spPr>
+          <a:xfrm>
+            <a:off x="685800" y="5632704"/>
+            <a:ext cx="50292" cy="475488"/>
+          </a:xfrm>
+          <a:prstGeom prst="rect">
+            <a:avLst/>
+          </a:prstGeom>
+          <a:solidFill>
+            <a:srgbClr val="0E7C86"/>
+          </a:solidFill>
+          <a:ln>
+            <a:noFill/>
+          </a:ln>
+          <a:effectLst/>
+        </p:spPr>
+        <p:style>
+          <a:lnRef idx="1">
+            <a:schemeClr val="accent1"/>
+          </a:lnRef>
+          <a:fillRef idx="3">
+            <a:schemeClr val="accent1"/>
+          </a:fillRef>
+          <a:effectRef idx="2">
+            <a:schemeClr val="accent1"/>
+          </a:effectRef>
+          <a:fontRef idx="minor">
+            <a:schemeClr val="lt1"/>
+          </a:fontRef>
+        </p:style>
+        <p:txBody>
+          <a:bodyPr rtlCol="0" anchor="ctr" wrap="square"/>
+          <a:lstStyle/>
+          <a:p>
+            <a:pPr algn="ctr"/>
+          </a:p>
+        </p:txBody>
+      </p:sp>
+      <p:sp>
+        <p:nvSpPr>
+          <p:cNvPr id="58" name="TextBox 57"/>
+          <p:cNvSpPr txBox="1"/>
+          <p:nvPr/>
+        </p:nvSpPr>
+        <p:spPr>
+          <a:xfrm>
+            <a:off x="886968" y="5715000"/>
+            <a:ext cx="10451592" cy="310896"/>
+          </a:xfrm>
+          <a:prstGeom prst="rect">
+            <a:avLst/>
+          </a:prstGeom>
+          <a:noFill/>
+        </p:spPr>
+        <p:txBody>
+          <a:bodyPr wrap="square" lIns="0" rIns="0" tIns="0" bIns="0" anchor="t">
+            <a:spAutoFit/>
+          </a:bodyPr>
+          <a:lstStyle/>
+          <a:p>
+            <a:pPr algn="l">
+              <a:lnSpc>
+                <a:spcPct val="106000"/>
+              </a:lnSpc>
+              <a:spcBef>
+                <a:spcPts val="0"/>
+              </a:spcBef>
+              <a:spcAft>
+                <a:spcPts val="0"/>
+              </a:spcAft>
+            </a:pPr>
+            <a:r>
+              <a:rPr sz="1050" b="1" i="0">
+                <a:solidFill>
+                  <a:srgbClr val="0A5A62"/>
+                </a:solidFill>
+                <a:latin typeface="Segoe UI"/>
+              </a:rPr>
+              <a:t>SAY THIS:  </a:t>
+            </a:r>
+            <a:r>
+              <a:rPr sz="1250" b="0" i="0">
+                <a:solidFill>
+                  <a:srgbClr val="11212E"/>
+                </a:solidFill>
+                <a:latin typeface="Segoe UI"/>
+              </a:rPr>
+              <a:t>A bit is just ON or OFF. Each extra bit doubles the values you can store.</a:t>
+            </a:r>
+          </a:p>
+        </p:txBody>
+      </p:sp>
+      <p:sp>
+        <p:nvSpPr>
+          <p:cNvPr id="59" name="Rectangle 58"/>
           <p:cNvSpPr/>
           <p:nvPr/>
         </p:nvSpPr>
@@ -10219,7 +10609,7 @@
       </p:sp>
       <p:sp>
         <p:nvSpPr>
-          <p:cNvPr id="57" name="TextBox 56"/>
+          <p:cNvPr id="60" name="TextBox 59"/>
           <p:cNvSpPr txBox="1"/>
           <p:nvPr/>
         </p:nvSpPr>
@@ -10261,7 +10651,7 @@
       </p:sp>
       <p:sp>
         <p:nvSpPr>
-          <p:cNvPr id="58" name="TextBox 57"/>
+          <p:cNvPr id="61" name="TextBox 60"/>
           <p:cNvSpPr txBox="1"/>
           <p:nvPr/>
         </p:nvSpPr>
@@ -12658,8 +13048,8 @@
         </p:nvSpPr>
         <p:spPr>
           <a:xfrm>
-            <a:off x="685800" y="4583303"/>
-            <a:ext cx="10835640" cy="1133856"/>
+            <a:off x="685800" y="4546727"/>
+            <a:ext cx="10835640" cy="1005840"/>
           </a:xfrm>
           <a:prstGeom prst="rect">
             <a:avLst/>
@@ -12702,7 +13092,7 @@
         </p:nvSpPr>
         <p:spPr>
           <a:xfrm>
-            <a:off x="896112" y="4674743"/>
+            <a:off x="896112" y="4619879"/>
             <a:ext cx="10424160" cy="219456"/>
           </a:xfrm>
           <a:prstGeom prst="rect">
@@ -12744,7 +13134,7 @@
         </p:nvSpPr>
         <p:spPr>
           <a:xfrm>
-            <a:off x="896112" y="4949063"/>
+            <a:off x="896112" y="4857623"/>
             <a:ext cx="10424160" cy="237744"/>
           </a:xfrm>
           <a:prstGeom prst="rect">
@@ -12795,7 +13185,7 @@
         </p:nvSpPr>
         <p:spPr>
           <a:xfrm>
-            <a:off x="896112" y="5314823"/>
+            <a:off x="896112" y="5150231"/>
             <a:ext cx="10424160" cy="237744"/>
           </a:xfrm>
           <a:prstGeom prst="rect">
@@ -12841,6 +13231,148 @@
       <p:sp>
         <p:nvSpPr>
           <p:cNvPr id="63" name="Rectangle 62"/>
+          <p:cNvSpPr/>
+          <p:nvPr/>
+        </p:nvSpPr>
+        <p:spPr>
+          <a:xfrm>
+            <a:off x="685800" y="5632704"/>
+            <a:ext cx="10835640" cy="475488"/>
+          </a:xfrm>
+          <a:prstGeom prst="rect">
+            <a:avLst/>
+          </a:prstGeom>
+          <a:solidFill>
+            <a:srgbClr val="E8F3F1"/>
+          </a:solidFill>
+          <a:ln>
+            <a:noFill/>
+          </a:ln>
+          <a:effectLst/>
+        </p:spPr>
+        <p:style>
+          <a:lnRef idx="1">
+            <a:schemeClr val="accent1"/>
+          </a:lnRef>
+          <a:fillRef idx="3">
+            <a:schemeClr val="accent1"/>
+          </a:fillRef>
+          <a:effectRef idx="2">
+            <a:schemeClr val="accent1"/>
+          </a:effectRef>
+          <a:fontRef idx="minor">
+            <a:schemeClr val="lt1"/>
+          </a:fontRef>
+        </p:style>
+        <p:txBody>
+          <a:bodyPr rtlCol="0" anchor="ctr" wrap="square"/>
+          <a:lstStyle/>
+          <a:p>
+            <a:pPr algn="ctr"/>
+          </a:p>
+        </p:txBody>
+      </p:sp>
+      <p:sp>
+        <p:nvSpPr>
+          <p:cNvPr id="64" name="Rectangle 63"/>
+          <p:cNvSpPr/>
+          <p:nvPr/>
+        </p:nvSpPr>
+        <p:spPr>
+          <a:xfrm>
+            <a:off x="685800" y="5632704"/>
+            <a:ext cx="50292" cy="475488"/>
+          </a:xfrm>
+          <a:prstGeom prst="rect">
+            <a:avLst/>
+          </a:prstGeom>
+          <a:solidFill>
+            <a:srgbClr val="0E7C86"/>
+          </a:solidFill>
+          <a:ln>
+            <a:noFill/>
+          </a:ln>
+          <a:effectLst/>
+        </p:spPr>
+        <p:style>
+          <a:lnRef idx="1">
+            <a:schemeClr val="accent1"/>
+          </a:lnRef>
+          <a:fillRef idx="3">
+            <a:schemeClr val="accent1"/>
+          </a:fillRef>
+          <a:effectRef idx="2">
+            <a:schemeClr val="accent1"/>
+          </a:effectRef>
+          <a:fontRef idx="minor">
+            <a:schemeClr val="lt1"/>
+          </a:fontRef>
+        </p:style>
+        <p:txBody>
+          <a:bodyPr rtlCol="0" anchor="ctr" wrap="square"/>
+          <a:lstStyle/>
+          <a:p>
+            <a:pPr algn="ctr"/>
+          </a:p>
+        </p:txBody>
+      </p:sp>
+      <p:sp>
+        <p:nvSpPr>
+          <p:cNvPr id="65" name="TextBox 64"/>
+          <p:cNvSpPr txBox="1"/>
+          <p:nvPr/>
+        </p:nvSpPr>
+        <p:spPr>
+          <a:xfrm>
+            <a:off x="886968" y="5715000"/>
+            <a:ext cx="10451592" cy="310896"/>
+          </a:xfrm>
+          <a:prstGeom prst="rect">
+            <a:avLst/>
+          </a:prstGeom>
+          <a:noFill/>
+        </p:spPr>
+        <p:txBody>
+          <a:bodyPr wrap="square" lIns="0" rIns="0" tIns="0" bIns="0" anchor="t">
+            <a:spAutoFit/>
+          </a:bodyPr>
+          <a:lstStyle/>
+          <a:p>
+            <a:pPr algn="l">
+              <a:lnSpc>
+                <a:spcPct val="106000"/>
+              </a:lnSpc>
+              <a:spcBef>
+                <a:spcPts val="0"/>
+              </a:spcBef>
+              <a:spcAft>
+                <a:spcPts val="0"/>
+              </a:spcAft>
+            </a:pPr>
+            <a:r>
+              <a:rPr sz="1050" b="1" i="0">
+                <a:solidFill>
+                  <a:srgbClr val="0A5A62"/>
+                </a:solidFill>
+                <a:latin typeface="Segoe UI"/>
+              </a:rPr>
+              <a:t>SAY THIS:  </a:t>
+            </a:r>
+            <a:r>
+              <a:rPr sz="1250" b="0" i="0">
+                <a:solidFill>
+                  <a:srgbClr val="11212E"/>
+                </a:solidFill>
+                <a:latin typeface="Segoe UI"/>
+              </a:rPr>
+              <a:t>A flip-flop remembers one bit by feeding its own output back into itself.</a:t>
+            </a:r>
+          </a:p>
+        </p:txBody>
+      </p:sp>
+      <p:sp>
+        <p:nvSpPr>
+          <p:cNvPr id="66" name="Rectangle 65"/>
           <p:cNvSpPr/>
           <p:nvPr/>
         </p:nvSpPr>
@@ -12884,7 +13416,7 @@
       </p:sp>
       <p:sp>
         <p:nvSpPr>
-          <p:cNvPr id="64" name="TextBox 63"/>
+          <p:cNvPr id="67" name="TextBox 66"/>
           <p:cNvSpPr txBox="1"/>
           <p:nvPr/>
         </p:nvSpPr>
@@ -12926,7 +13458,7 @@
       </p:sp>
       <p:sp>
         <p:nvSpPr>
-          <p:cNvPr id="65" name="TextBox 64"/>
+          <p:cNvPr id="68" name="TextBox 67"/>
           <p:cNvSpPr txBox="1"/>
           <p:nvPr/>
         </p:nvSpPr>
@@ -14960,8 +15492,8 @@
         </p:nvSpPr>
         <p:spPr>
           <a:xfrm>
-            <a:off x="1325880" y="4455286"/>
-            <a:ext cx="4434840" cy="237744"/>
+            <a:off x="1005840" y="4418710"/>
+            <a:ext cx="5074920" cy="219456"/>
           </a:xfrm>
           <a:prstGeom prst="rect">
             <a:avLst/>
@@ -15002,7 +15534,7 @@
         </p:nvSpPr>
         <p:spPr>
           <a:xfrm>
-            <a:off x="960120" y="4766183"/>
+            <a:off x="960120" y="4711318"/>
             <a:ext cx="219456" cy="274320"/>
           </a:xfrm>
           <a:prstGeom prst="rect">
@@ -15025,7 +15557,7 @@
               </a:spcAft>
             </a:pPr>
             <a:r>
-              <a:rPr sz="1150" b="1" i="0">
+              <a:rPr sz="1100" b="1" i="0">
                 <a:solidFill>
                   <a:srgbClr val="0E7C86"/>
                 </a:solidFill>
@@ -15044,8 +15576,8 @@
         </p:nvSpPr>
         <p:spPr>
           <a:xfrm>
-            <a:off x="1234440" y="4766183"/>
-            <a:ext cx="4160520" cy="401554"/>
+            <a:off x="1234440" y="4711318"/>
+            <a:ext cx="4160520" cy="385686"/>
           </a:xfrm>
           <a:prstGeom prst="rect">
             <a:avLst/>
@@ -15070,7 +15602,7 @@
               </a:spcAft>
             </a:pPr>
             <a:r>
-              <a:rPr sz="1150" b="1" i="0">
+              <a:rPr sz="1100" b="1" i="0">
                 <a:solidFill>
                   <a:srgbClr val="11212E"/>
                 </a:solidFill>
@@ -15079,13 +15611,13 @@
               <a:t>One clock, one update. </a:t>
             </a:r>
             <a:r>
-              <a:rPr sz="1150" b="0" i="0">
+              <a:rPr sz="1100" b="0" i="0">
                 <a:solidFill>
                   <a:srgbClr val="11212E"/>
                 </a:solidFill>
                 <a:latin typeface="Segoe UI"/>
               </a:rPr>
-              <a:t>All bits change together, so the word is never half-written.</a:t>
+              <a:t>All bits change together, so a word is never half-written.</a:t>
             </a:r>
           </a:p>
         </p:txBody>
@@ -15098,7 +15630,7 @@
         </p:nvSpPr>
         <p:spPr>
           <a:xfrm>
-            <a:off x="960120" y="5387154"/>
+            <a:off x="960120" y="5315628"/>
             <a:ext cx="219456" cy="274320"/>
           </a:xfrm>
           <a:prstGeom prst="rect">
@@ -15121,7 +15653,7 @@
               </a:spcAft>
             </a:pPr>
             <a:r>
-              <a:rPr sz="1150" b="1" i="0">
+              <a:rPr sz="1100" b="1" i="0">
                 <a:solidFill>
                   <a:srgbClr val="0E7C86"/>
                 </a:solidFill>
@@ -15140,8 +15672,8 @@
         </p:nvSpPr>
         <p:spPr>
           <a:xfrm>
-            <a:off x="1234440" y="5387154"/>
-            <a:ext cx="4160520" cy="219065"/>
+            <a:off x="1234440" y="5315628"/>
+            <a:ext cx="4160520" cy="211131"/>
           </a:xfrm>
           <a:prstGeom prst="rect">
             <a:avLst/>
@@ -15166,7 +15698,7 @@
               </a:spcAft>
             </a:pPr>
             <a:r>
-              <a:rPr sz="1150" b="1" i="0">
+              <a:rPr sz="1100" b="1" i="0">
                 <a:solidFill>
                   <a:srgbClr val="11212E"/>
                 </a:solidFill>
@@ -15175,13 +15707,13 @@
               <a:t>Width = flip-flop count. </a:t>
             </a:r>
             <a:r>
-              <a:rPr sz="1150" b="0" i="0">
+              <a:rPr sz="1100" b="0" i="0">
                 <a:solidFill>
                   <a:srgbClr val="11212E"/>
                 </a:solidFill>
                 <a:latin typeface="Segoe UI"/>
               </a:rPr>
-              <a:t>8-bit = 8 FFs, 64-bit = 64 FFs.</a:t>
+              <a:t>An 8-bit register is 8 flip-flops.</a:t>
             </a:r>
           </a:p>
         </p:txBody>
@@ -15873,8 +16405,8 @@
         </p:nvSpPr>
         <p:spPr>
           <a:xfrm>
-            <a:off x="5989320" y="4912487"/>
-            <a:ext cx="5486400" cy="548640"/>
+            <a:off x="5989320" y="4857623"/>
+            <a:ext cx="5486400" cy="512064"/>
           </a:xfrm>
           <a:prstGeom prst="roundRect">
             <a:avLst>
@@ -15919,8 +16451,8 @@
         </p:nvSpPr>
         <p:spPr>
           <a:xfrm>
-            <a:off x="6245352" y="5058791"/>
-            <a:ext cx="4974336" cy="274319"/>
+            <a:off x="6245352" y="5003927"/>
+            <a:ext cx="4974336" cy="237743"/>
           </a:xfrm>
           <a:prstGeom prst="rect">
             <a:avLst/>
@@ -15945,7 +16477,7 @@
               </a:spcAft>
             </a:pPr>
             <a:r>
-              <a:rPr sz="1200" b="0" i="0">
+              <a:rPr sz="1150" b="0" i="0">
                 <a:solidFill>
                   <a:srgbClr val="D6F0EE"/>
                 </a:solidFill>
@@ -15964,8 +16496,147 @@
         </p:nvSpPr>
         <p:spPr>
           <a:xfrm>
-            <a:off x="5989320" y="5570855"/>
-            <a:ext cx="5486400" cy="566928"/>
+            <a:off x="5989320" y="5461127"/>
+            <a:ext cx="5486400" cy="365760"/>
+          </a:xfrm>
+          <a:prstGeom prst="rect">
+            <a:avLst/>
+          </a:prstGeom>
+          <a:noFill/>
+        </p:spPr>
+        <p:txBody>
+          <a:bodyPr wrap="square" lIns="0" rIns="0" tIns="0" bIns="0" anchor="t">
+            <a:spAutoFit/>
+          </a:bodyPr>
+          <a:lstStyle/>
+          <a:p>
+            <a:pPr algn="l">
+              <a:spcBef>
+                <a:spcPts val="0"/>
+              </a:spcBef>
+              <a:spcAft>
+                <a:spcPts val="0"/>
+              </a:spcAft>
+            </a:pPr>
+            <a:r>
+              <a:rPr sz="1000" b="1" i="0">
+                <a:solidFill>
+                  <a:srgbClr val="11212E"/>
+                </a:solidFill>
+                <a:latin typeface="Segoe UI"/>
+              </a:rPr>
+              <a:t>Read right to left: </a:t>
+            </a:r>
+            <a:r>
+              <a:rPr sz="1000" b="0" i="0">
+                <a:solidFill>
+                  <a:srgbClr val="4A5A69"/>
+                </a:solidFill>
+                <a:latin typeface="Segoe UI"/>
+              </a:rPr>
+              <a:t>the source is copied, the destination overwritten.</a:t>
+            </a:r>
+          </a:p>
+        </p:txBody>
+      </p:sp>
+      <p:sp>
+        <p:nvSpPr>
+          <p:cNvPr id="62" name="Rectangle 61"/>
+          <p:cNvSpPr/>
+          <p:nvPr/>
+        </p:nvSpPr>
+        <p:spPr>
+          <a:xfrm>
+            <a:off x="685800" y="5632704"/>
+            <a:ext cx="10835640" cy="475488"/>
+          </a:xfrm>
+          <a:prstGeom prst="rect">
+            <a:avLst/>
+          </a:prstGeom>
+          <a:solidFill>
+            <a:srgbClr val="E8F3F1"/>
+          </a:solidFill>
+          <a:ln>
+            <a:noFill/>
+          </a:ln>
+          <a:effectLst/>
+        </p:spPr>
+        <p:style>
+          <a:lnRef idx="1">
+            <a:schemeClr val="accent1"/>
+          </a:lnRef>
+          <a:fillRef idx="3">
+            <a:schemeClr val="accent1"/>
+          </a:fillRef>
+          <a:effectRef idx="2">
+            <a:schemeClr val="accent1"/>
+          </a:effectRef>
+          <a:fontRef idx="minor">
+            <a:schemeClr val="lt1"/>
+          </a:fontRef>
+        </p:style>
+        <p:txBody>
+          <a:bodyPr rtlCol="0" anchor="ctr" wrap="square"/>
+          <a:lstStyle/>
+          <a:p>
+            <a:pPr algn="ctr"/>
+          </a:p>
+        </p:txBody>
+      </p:sp>
+      <p:sp>
+        <p:nvSpPr>
+          <p:cNvPr id="63" name="Rectangle 62"/>
+          <p:cNvSpPr/>
+          <p:nvPr/>
+        </p:nvSpPr>
+        <p:spPr>
+          <a:xfrm>
+            <a:off x="685800" y="5632704"/>
+            <a:ext cx="50292" cy="475488"/>
+          </a:xfrm>
+          <a:prstGeom prst="rect">
+            <a:avLst/>
+          </a:prstGeom>
+          <a:solidFill>
+            <a:srgbClr val="0E7C86"/>
+          </a:solidFill>
+          <a:ln>
+            <a:noFill/>
+          </a:ln>
+          <a:effectLst/>
+        </p:spPr>
+        <p:style>
+          <a:lnRef idx="1">
+            <a:schemeClr val="accent1"/>
+          </a:lnRef>
+          <a:fillRef idx="3">
+            <a:schemeClr val="accent1"/>
+          </a:fillRef>
+          <a:effectRef idx="2">
+            <a:schemeClr val="accent1"/>
+          </a:effectRef>
+          <a:fontRef idx="minor">
+            <a:schemeClr val="lt1"/>
+          </a:fontRef>
+        </p:style>
+        <p:txBody>
+          <a:bodyPr rtlCol="0" anchor="ctr" wrap="square"/>
+          <a:lstStyle/>
+          <a:p>
+            <a:pPr algn="ctr"/>
+          </a:p>
+        </p:txBody>
+      </p:sp>
+      <p:sp>
+        <p:nvSpPr>
+          <p:cNvPr id="64" name="TextBox 63"/>
+          <p:cNvSpPr txBox="1"/>
+          <p:nvPr/>
+        </p:nvSpPr>
+        <p:spPr>
+          <a:xfrm>
+            <a:off x="886968" y="5715000"/>
+            <a:ext cx="10451592" cy="310896"/>
           </a:xfrm>
           <a:prstGeom prst="rect">
             <a:avLst/>
@@ -15980,7 +16651,7 @@
           <a:p>
             <a:pPr algn="l">
               <a:lnSpc>
-                <a:spcPct val="112000"/>
+                <a:spcPct val="106000"/>
               </a:lnSpc>
               <a:spcBef>
                 <a:spcPts val="0"/>
@@ -15990,29 +16661,29 @@
               </a:spcAft>
             </a:pPr>
             <a:r>
-              <a:rPr sz="1000" b="1" i="0">
+              <a:rPr sz="1050" b="1" i="0">
+                <a:solidFill>
+                  <a:srgbClr val="0A5A62"/>
+                </a:solidFill>
+                <a:latin typeface="Segoe UI"/>
+              </a:rPr>
+              <a:t>SAY THIS:  </a:t>
+            </a:r>
+            <a:r>
+              <a:rPr sz="1250" b="0" i="0">
                 <a:solidFill>
                   <a:srgbClr val="11212E"/>
                 </a:solidFill>
                 <a:latin typeface="Segoe UI"/>
               </a:rPr>
-              <a:t>Read right to left: </a:t>
-            </a:r>
-            <a:r>
-              <a:rPr sz="1000" b="0" i="0">
-                <a:solidFill>
-                  <a:srgbClr val="4A5A69"/>
-                </a:solidFill>
-                <a:latin typeface="Segoe UI"/>
-              </a:rPr>
-              <a:t>the source is copied, the destination overwritten. It only happens when its control signal is 1, e.g. if T3 = 1 then R2 ← R1.</a:t>
-            </a:r>
-          </a:p>
-        </p:txBody>
-      </p:sp>
-      <p:sp>
-        <p:nvSpPr>
-          <p:cNvPr id="62" name="Rectangle 61"/>
+              <a:t>A register is a row of flip-flops that all take a new value at the same instant.</a:t>
+            </a:r>
+          </a:p>
+        </p:txBody>
+      </p:sp>
+      <p:sp>
+        <p:nvSpPr>
+          <p:cNvPr id="65" name="Rectangle 64"/>
           <p:cNvSpPr/>
           <p:nvPr/>
         </p:nvSpPr>
@@ -16056,7 +16727,7 @@
       </p:sp>
       <p:sp>
         <p:nvSpPr>
-          <p:cNvPr id="63" name="TextBox 62"/>
+          <p:cNvPr id="66" name="TextBox 65"/>
           <p:cNvSpPr txBox="1"/>
           <p:nvPr/>
         </p:nvSpPr>
@@ -16098,7 +16769,7 @@
       </p:sp>
       <p:sp>
         <p:nvSpPr>
-          <p:cNvPr id="64" name="TextBox 63"/>
+          <p:cNvPr id="67" name="TextBox 66"/>
           <p:cNvSpPr txBox="1"/>
           <p:nvPr/>
         </p:nvSpPr>
@@ -19042,8 +19713,8 @@
         </p:nvSpPr>
         <p:spPr>
           <a:xfrm>
-            <a:off x="6355080" y="4747895"/>
-            <a:ext cx="5120640" cy="457200"/>
+            <a:off x="6355080" y="4711318"/>
+            <a:ext cx="5120640" cy="402336"/>
           </a:xfrm>
           <a:prstGeom prst="rect">
             <a:avLst/>
@@ -19074,519 +19745,21 @@
                 </a:solidFill>
                 <a:latin typeface="Segoe UI"/>
               </a:rPr>
-              <a:t>Tri-state buffers have a third output state, high-Z. So many registers can share one bus — but exactly one enable may be active.</a:t>
-            </a:r>
-          </a:p>
-        </p:txBody>
-      </p:sp>
-      <p:sp>
-        <p:nvSpPr>
-          <p:cNvPr id="68" name="Rounded Rectangle 67"/>
+              <a:t>Tri-state buffers have a third output state, high-Z, so many registers can share one bus — but only one enable may be active.</a:t>
+            </a:r>
+          </a:p>
+        </p:txBody>
+      </p:sp>
+      <p:sp>
+        <p:nvSpPr>
+          <p:cNvPr id="68" name="Rectangle 67"/>
           <p:cNvSpPr/>
           <p:nvPr/>
         </p:nvSpPr>
         <p:spPr>
           <a:xfrm>
-            <a:off x="6355080" y="5278247"/>
-            <a:ext cx="786384" cy="274320"/>
-          </a:xfrm>
-          <a:prstGeom prst="roundRect">
-            <a:avLst>
-              <a:gd name="adj" fmla="val 12000"/>
-            </a:avLst>
-          </a:prstGeom>
-          <a:solidFill>
-            <a:srgbClr val="FFFFFF"/>
-          </a:solidFill>
-          <a:ln w="12700">
-            <a:solidFill>
-              <a:srgbClr val="0A5A62"/>
-            </a:solidFill>
-          </a:ln>
-          <a:effectLst/>
-        </p:spPr>
-        <p:style>
-          <a:lnRef idx="1">
-            <a:schemeClr val="accent1"/>
-          </a:lnRef>
-          <a:fillRef idx="3">
-            <a:schemeClr val="accent1"/>
-          </a:fillRef>
-          <a:effectRef idx="2">
-            <a:schemeClr val="accent1"/>
-          </a:effectRef>
-          <a:fontRef idx="minor">
-            <a:schemeClr val="lt1"/>
-          </a:fontRef>
-        </p:style>
-        <p:txBody>
-          <a:bodyPr rtlCol="0" anchor="ctr" wrap="square"/>
-          <a:lstStyle/>
-          <a:p>
-            <a:pPr algn="ctr"/>
-          </a:p>
-        </p:txBody>
-      </p:sp>
-      <p:sp>
-        <p:nvSpPr>
-          <p:cNvPr id="69" name="TextBox 68"/>
-          <p:cNvSpPr txBox="1"/>
-          <p:nvPr/>
-        </p:nvSpPr>
-        <p:spPr>
-          <a:xfrm>
-            <a:off x="6355080" y="5323967"/>
-            <a:ext cx="786384" cy="201168"/>
-          </a:xfrm>
-          <a:prstGeom prst="rect">
-            <a:avLst/>
-          </a:prstGeom>
-          <a:noFill/>
-        </p:spPr>
-        <p:txBody>
-          <a:bodyPr wrap="square" lIns="0" rIns="0" tIns="0" bIns="0" anchor="t">
-            <a:spAutoFit/>
-          </a:bodyPr>
-          <a:lstStyle/>
-          <a:p>
-            <a:pPr algn="ctr">
-              <a:spcBef>
-                <a:spcPts val="0"/>
-              </a:spcBef>
-              <a:spcAft>
-                <a:spcPts val="0"/>
-              </a:spcAft>
-            </a:pPr>
-            <a:r>
-              <a:rPr sz="900" b="1" i="0">
-                <a:solidFill>
-                  <a:srgbClr val="0A5A62"/>
-                </a:solidFill>
-                <a:latin typeface="Consolas"/>
-              </a:rPr>
-              <a:t>R1</a:t>
-            </a:r>
-          </a:p>
-        </p:txBody>
-      </p:sp>
-      <p:cxnSp>
-        <p:nvCxnSpPr>
-          <p:cNvPr id="70" name="Connector 69"/>
-          <p:cNvCxnSpPr/>
-          <p:nvPr/>
-        </p:nvCxnSpPr>
-        <p:spPr>
-          <a:xfrm>
-            <a:off x="7159752" y="5415407"/>
-            <a:ext cx="557784" cy="0"/>
-          </a:xfrm>
-          <a:prstGeom prst="line">
-            <a:avLst/>
-          </a:prstGeom>
-          <a:ln w="12700">
-            <a:solidFill>
-              <a:srgbClr val="0A5A62"/>
-            </a:solidFill>
-            <a:tailEnd type="triangle" w="med" len="med"/>
-          </a:ln>
-        </p:spPr>
-        <p:style>
-          <a:lnRef idx="2">
-            <a:schemeClr val="accent1"/>
-          </a:lnRef>
-          <a:fillRef idx="0">
-            <a:schemeClr val="accent1"/>
-          </a:fillRef>
-          <a:effectRef idx="1">
-            <a:schemeClr val="accent1"/>
-          </a:effectRef>
-          <a:fontRef idx="minor">
-            <a:schemeClr val="tx1"/>
-          </a:fontRef>
-        </p:style>
-      </p:cxnSp>
-      <p:sp>
-        <p:nvSpPr>
-          <p:cNvPr id="71" name="Rounded Rectangle 70"/>
-          <p:cNvSpPr/>
-          <p:nvPr/>
-        </p:nvSpPr>
-        <p:spPr>
-          <a:xfrm>
-            <a:off x="6355080" y="5644007"/>
-            <a:ext cx="786384" cy="274320"/>
-          </a:xfrm>
-          <a:prstGeom prst="roundRect">
-            <a:avLst>
-              <a:gd name="adj" fmla="val 12000"/>
-            </a:avLst>
-          </a:prstGeom>
-          <a:solidFill>
-            <a:srgbClr val="FFFFFF"/>
-          </a:solidFill>
-          <a:ln w="12700">
-            <a:solidFill>
-              <a:srgbClr val="0A5A62"/>
-            </a:solidFill>
-          </a:ln>
-          <a:effectLst/>
-        </p:spPr>
-        <p:style>
-          <a:lnRef idx="1">
-            <a:schemeClr val="accent1"/>
-          </a:lnRef>
-          <a:fillRef idx="3">
-            <a:schemeClr val="accent1"/>
-          </a:fillRef>
-          <a:effectRef idx="2">
-            <a:schemeClr val="accent1"/>
-          </a:effectRef>
-          <a:fontRef idx="minor">
-            <a:schemeClr val="lt1"/>
-          </a:fontRef>
-        </p:style>
-        <p:txBody>
-          <a:bodyPr rtlCol="0" anchor="ctr" wrap="square"/>
-          <a:lstStyle/>
-          <a:p>
-            <a:pPr algn="ctr"/>
-          </a:p>
-        </p:txBody>
-      </p:sp>
-      <p:sp>
-        <p:nvSpPr>
-          <p:cNvPr id="72" name="TextBox 71"/>
-          <p:cNvSpPr txBox="1"/>
-          <p:nvPr/>
-        </p:nvSpPr>
-        <p:spPr>
-          <a:xfrm>
-            <a:off x="6355080" y="5689727"/>
-            <a:ext cx="786384" cy="201168"/>
-          </a:xfrm>
-          <a:prstGeom prst="rect">
-            <a:avLst/>
-          </a:prstGeom>
-          <a:noFill/>
-        </p:spPr>
-        <p:txBody>
-          <a:bodyPr wrap="square" lIns="0" rIns="0" tIns="0" bIns="0" anchor="t">
-            <a:spAutoFit/>
-          </a:bodyPr>
-          <a:lstStyle/>
-          <a:p>
-            <a:pPr algn="ctr">
-              <a:spcBef>
-                <a:spcPts val="0"/>
-              </a:spcBef>
-              <a:spcAft>
-                <a:spcPts val="0"/>
-              </a:spcAft>
-            </a:pPr>
-            <a:r>
-              <a:rPr sz="900" b="1" i="0">
-                <a:solidFill>
-                  <a:srgbClr val="0A5A62"/>
-                </a:solidFill>
-                <a:latin typeface="Consolas"/>
-              </a:rPr>
-              <a:t>R2</a:t>
-            </a:r>
-          </a:p>
-        </p:txBody>
-      </p:sp>
-      <p:cxnSp>
-        <p:nvCxnSpPr>
-          <p:cNvPr id="73" name="Connector 72"/>
-          <p:cNvCxnSpPr/>
-          <p:nvPr/>
-        </p:nvCxnSpPr>
-        <p:spPr>
-          <a:xfrm>
-            <a:off x="7159752" y="5781167"/>
-            <a:ext cx="557784" cy="0"/>
-          </a:xfrm>
-          <a:prstGeom prst="line">
-            <a:avLst/>
-          </a:prstGeom>
-          <a:ln w="12700">
-            <a:solidFill>
-              <a:srgbClr val="0A5A62"/>
-            </a:solidFill>
-            <a:tailEnd type="triangle" w="med" len="med"/>
-          </a:ln>
-        </p:spPr>
-        <p:style>
-          <a:lnRef idx="2">
-            <a:schemeClr val="accent1"/>
-          </a:lnRef>
-          <a:fillRef idx="0">
-            <a:schemeClr val="accent1"/>
-          </a:fillRef>
-          <a:effectRef idx="1">
-            <a:schemeClr val="accent1"/>
-          </a:effectRef>
-          <a:fontRef idx="minor">
-            <a:schemeClr val="tx1"/>
-          </a:fontRef>
-        </p:style>
-      </p:cxnSp>
-      <p:cxnSp>
-        <p:nvCxnSpPr>
-          <p:cNvPr id="74" name="Connector 73"/>
-          <p:cNvCxnSpPr/>
-          <p:nvPr/>
-        </p:nvCxnSpPr>
-        <p:spPr>
-          <a:xfrm>
-            <a:off x="7735824" y="5241670"/>
-            <a:ext cx="0" cy="713233"/>
-          </a:xfrm>
-          <a:prstGeom prst="line">
-            <a:avLst/>
-          </a:prstGeom>
-          <a:ln w="33020">
-            <a:solidFill>
-              <a:srgbClr val="0A5A62"/>
-            </a:solidFill>
-          </a:ln>
-        </p:spPr>
-        <p:style>
-          <a:lnRef idx="2">
-            <a:schemeClr val="accent1"/>
-          </a:lnRef>
-          <a:fillRef idx="0">
-            <a:schemeClr val="accent1"/>
-          </a:fillRef>
-          <a:effectRef idx="1">
-            <a:schemeClr val="accent1"/>
-          </a:effectRef>
-          <a:fontRef idx="minor">
-            <a:schemeClr val="tx1"/>
-          </a:fontRef>
-        </p:style>
-      </p:cxnSp>
-      <p:sp>
-        <p:nvSpPr>
-          <p:cNvPr id="75" name="Oval 74"/>
-          <p:cNvSpPr/>
-          <p:nvPr/>
-        </p:nvSpPr>
-        <p:spPr>
-          <a:xfrm>
-            <a:off x="7699248" y="5378831"/>
-            <a:ext cx="73152" cy="73152"/>
-          </a:xfrm>
-          <a:prstGeom prst="ellipse">
-            <a:avLst/>
-          </a:prstGeom>
-          <a:solidFill>
-            <a:srgbClr val="0A5A62"/>
-          </a:solidFill>
-          <a:ln>
-            <a:noFill/>
-          </a:ln>
-          <a:effectLst/>
-        </p:spPr>
-        <p:style>
-          <a:lnRef idx="1">
-            <a:schemeClr val="accent1"/>
-          </a:lnRef>
-          <a:fillRef idx="3">
-            <a:schemeClr val="accent1"/>
-          </a:fillRef>
-          <a:effectRef idx="2">
-            <a:schemeClr val="accent1"/>
-          </a:effectRef>
-          <a:fontRef idx="minor">
-            <a:schemeClr val="lt1"/>
-          </a:fontRef>
-        </p:style>
-        <p:txBody>
-          <a:bodyPr rtlCol="0" anchor="ctr"/>
-          <a:lstStyle/>
-          <a:p>
-            <a:pPr algn="ctr"/>
-          </a:p>
-        </p:txBody>
-      </p:sp>
-      <p:sp>
-        <p:nvSpPr>
-          <p:cNvPr id="76" name="Oval 75"/>
-          <p:cNvSpPr/>
-          <p:nvPr/>
-        </p:nvSpPr>
-        <p:spPr>
-          <a:xfrm>
-            <a:off x="7699248" y="5744591"/>
-            <a:ext cx="73152" cy="73152"/>
-          </a:xfrm>
-          <a:prstGeom prst="ellipse">
-            <a:avLst/>
-          </a:prstGeom>
-          <a:solidFill>
-            <a:srgbClr val="0A5A62"/>
-          </a:solidFill>
-          <a:ln>
-            <a:noFill/>
-          </a:ln>
-          <a:effectLst/>
-        </p:spPr>
-        <p:style>
-          <a:lnRef idx="1">
-            <a:schemeClr val="accent1"/>
-          </a:lnRef>
-          <a:fillRef idx="3">
-            <a:schemeClr val="accent1"/>
-          </a:fillRef>
-          <a:effectRef idx="2">
-            <a:schemeClr val="accent1"/>
-          </a:effectRef>
-          <a:fontRef idx="minor">
-            <a:schemeClr val="lt1"/>
-          </a:fontRef>
-        </p:style>
-        <p:txBody>
-          <a:bodyPr rtlCol="0" anchor="ctr"/>
-          <a:lstStyle/>
-          <a:p>
-            <a:pPr algn="ctr"/>
-          </a:p>
-        </p:txBody>
-      </p:sp>
-      <p:cxnSp>
-        <p:nvCxnSpPr>
-          <p:cNvPr id="77" name="Connector 76"/>
-          <p:cNvCxnSpPr/>
-          <p:nvPr/>
-        </p:nvCxnSpPr>
-        <p:spPr>
-          <a:xfrm>
-            <a:off x="7735824" y="5589143"/>
-            <a:ext cx="585216" cy="0"/>
-          </a:xfrm>
-          <a:prstGeom prst="line">
-            <a:avLst/>
-          </a:prstGeom>
-          <a:ln w="15240">
-            <a:solidFill>
-              <a:srgbClr val="0E7C86"/>
-            </a:solidFill>
-            <a:tailEnd type="triangle" w="med" len="med"/>
-          </a:ln>
-        </p:spPr>
-        <p:style>
-          <a:lnRef idx="2">
-            <a:schemeClr val="accent1"/>
-          </a:lnRef>
-          <a:fillRef idx="0">
-            <a:schemeClr val="accent1"/>
-          </a:fillRef>
-          <a:effectRef idx="1">
-            <a:schemeClr val="accent1"/>
-          </a:effectRef>
-          <a:fontRef idx="minor">
-            <a:schemeClr val="tx1"/>
-          </a:fontRef>
-        </p:style>
-      </p:cxnSp>
-      <p:sp>
-        <p:nvSpPr>
-          <p:cNvPr id="78" name="TextBox 77"/>
-          <p:cNvSpPr txBox="1"/>
-          <p:nvPr/>
-        </p:nvSpPr>
-        <p:spPr>
-          <a:xfrm>
-            <a:off x="8375904" y="5479414"/>
-            <a:ext cx="1463040" cy="219456"/>
-          </a:xfrm>
-          <a:prstGeom prst="rect">
-            <a:avLst/>
-          </a:prstGeom>
-          <a:noFill/>
-        </p:spPr>
-        <p:txBody>
-          <a:bodyPr wrap="square" lIns="0" rIns="0" tIns="0" bIns="0" anchor="t">
-            <a:spAutoFit/>
-          </a:bodyPr>
-          <a:lstStyle/>
-          <a:p>
-            <a:pPr algn="l">
-              <a:spcBef>
-                <a:spcPts val="0"/>
-              </a:spcBef>
-              <a:spcAft>
-                <a:spcPts val="0"/>
-              </a:spcAft>
-            </a:pPr>
-            <a:r>
-              <a:rPr sz="900" b="1" i="0">
-                <a:solidFill>
-                  <a:srgbClr val="0E7C86"/>
-                </a:solidFill>
-                <a:latin typeface="Consolas"/>
-              </a:rPr>
-              <a:t>R3 ← bus</a:t>
-            </a:r>
-          </a:p>
-        </p:txBody>
-      </p:sp>
-      <p:sp>
-        <p:nvSpPr>
-          <p:cNvPr id="79" name="TextBox 78"/>
-          <p:cNvSpPr txBox="1"/>
-          <p:nvPr/>
-        </p:nvSpPr>
-        <p:spPr>
-          <a:xfrm>
-            <a:off x="8778240" y="5186807"/>
-            <a:ext cx="2697480" cy="658368"/>
-          </a:xfrm>
-          <a:prstGeom prst="rect">
-            <a:avLst/>
-          </a:prstGeom>
-          <a:noFill/>
-        </p:spPr>
-        <p:txBody>
-          <a:bodyPr wrap="square" lIns="0" rIns="0" tIns="0" bIns="0" anchor="t">
-            <a:spAutoFit/>
-          </a:bodyPr>
-          <a:lstStyle/>
-          <a:p>
-            <a:pPr algn="l">
-              <a:lnSpc>
-                <a:spcPct val="110000"/>
-              </a:lnSpc>
-              <a:spcBef>
-                <a:spcPts val="0"/>
-              </a:spcBef>
-              <a:spcAft>
-                <a:spcPts val="0"/>
-              </a:spcAft>
-            </a:pPr>
-            <a:r>
-              <a:rPr sz="950" b="0" i="0">
-                <a:solidFill>
-                  <a:srgbClr val="788897"/>
-                </a:solidFill>
-                <a:latin typeface="Segoe UI"/>
-              </a:rPr>
-              <a:t>Only the enabled register drives the line; the others float at high-Z.</a:t>
-            </a:r>
-          </a:p>
-        </p:txBody>
-      </p:sp>
-      <p:sp>
-        <p:nvSpPr>
-          <p:cNvPr id="80" name="Rectangle 79"/>
-          <p:cNvSpPr/>
-          <p:nvPr/>
-        </p:nvSpPr>
-        <p:spPr>
-          <a:xfrm>
-            <a:off x="8732520" y="5863462"/>
-            <a:ext cx="2743200" cy="512064"/>
+            <a:off x="6355080" y="5241670"/>
+            <a:ext cx="5120640" cy="566928"/>
           </a:xfrm>
           <a:prstGeom prst="rect">
             <a:avLst/>
@@ -19623,14 +19796,14 @@
       </p:sp>
       <p:sp>
         <p:nvSpPr>
-          <p:cNvPr id="81" name="TextBox 80"/>
-          <p:cNvSpPr txBox="1"/>
-          <p:nvPr/>
-        </p:nvSpPr>
-        <p:spPr>
-          <a:xfrm>
-            <a:off x="8869680" y="5954903"/>
-            <a:ext cx="2487168" cy="365760"/>
+          <p:cNvPr id="69" name="TextBox 68"/>
+          <p:cNvSpPr txBox="1"/>
+          <p:nvPr/>
+        </p:nvSpPr>
+        <p:spPr>
+          <a:xfrm>
+            <a:off x="6547104" y="5333110"/>
+            <a:ext cx="4754880" cy="402336"/>
           </a:xfrm>
           <a:prstGeom prst="rect">
             <a:avLst/>
@@ -19645,7 +19818,7 @@
           <a:p>
             <a:pPr algn="l">
               <a:lnSpc>
-                <a:spcPct val="105000"/>
+                <a:spcPct val="110000"/>
               </a:lnSpc>
               <a:spcBef>
                 <a:spcPts val="0"/>
@@ -19655,29 +19828,171 @@
               </a:spcAft>
             </a:pPr>
             <a:r>
-              <a:rPr sz="850" b="1" i="0">
+              <a:rPr sz="1000" b="0" i="0">
+                <a:solidFill>
+                  <a:srgbClr val="4A5A69"/>
+                </a:solidFill>
+                <a:latin typeface="Segoe UI"/>
+              </a:rPr>
+              <a:t>Two registers enabled at once → contention, </a:t>
+            </a:r>
+            <a:r>
+              <a:rPr sz="1000" b="1" i="0">
                 <a:solidFill>
                   <a:srgbClr val="D98400"/>
                 </a:solidFill>
                 <a:latin typeface="Segoe UI"/>
               </a:rPr>
-              <a:t>Two enabled at once = </a:t>
-            </a:r>
-            <a:r>
-              <a:rPr sz="850" b="0" i="0">
-                <a:solidFill>
-                  <a:srgbClr val="4A5A69"/>
+              <a:t>a short circuit, not just a wrong value.</a:t>
+            </a:r>
+          </a:p>
+        </p:txBody>
+      </p:sp>
+      <p:sp>
+        <p:nvSpPr>
+          <p:cNvPr id="70" name="Rectangle 69"/>
+          <p:cNvSpPr/>
+          <p:nvPr/>
+        </p:nvSpPr>
+        <p:spPr>
+          <a:xfrm>
+            <a:off x="685800" y="5632704"/>
+            <a:ext cx="10835640" cy="475488"/>
+          </a:xfrm>
+          <a:prstGeom prst="rect">
+            <a:avLst/>
+          </a:prstGeom>
+          <a:solidFill>
+            <a:srgbClr val="E8F3F1"/>
+          </a:solidFill>
+          <a:ln>
+            <a:noFill/>
+          </a:ln>
+          <a:effectLst/>
+        </p:spPr>
+        <p:style>
+          <a:lnRef idx="1">
+            <a:schemeClr val="accent1"/>
+          </a:lnRef>
+          <a:fillRef idx="3">
+            <a:schemeClr val="accent1"/>
+          </a:fillRef>
+          <a:effectRef idx="2">
+            <a:schemeClr val="accent1"/>
+          </a:effectRef>
+          <a:fontRef idx="minor">
+            <a:schemeClr val="lt1"/>
+          </a:fontRef>
+        </p:style>
+        <p:txBody>
+          <a:bodyPr rtlCol="0" anchor="ctr" wrap="square"/>
+          <a:lstStyle/>
+          <a:p>
+            <a:pPr algn="ctr"/>
+          </a:p>
+        </p:txBody>
+      </p:sp>
+      <p:sp>
+        <p:nvSpPr>
+          <p:cNvPr id="71" name="Rectangle 70"/>
+          <p:cNvSpPr/>
+          <p:nvPr/>
+        </p:nvSpPr>
+        <p:spPr>
+          <a:xfrm>
+            <a:off x="685800" y="5632704"/>
+            <a:ext cx="50292" cy="475488"/>
+          </a:xfrm>
+          <a:prstGeom prst="rect">
+            <a:avLst/>
+          </a:prstGeom>
+          <a:solidFill>
+            <a:srgbClr val="0E7C86"/>
+          </a:solidFill>
+          <a:ln>
+            <a:noFill/>
+          </a:ln>
+          <a:effectLst/>
+        </p:spPr>
+        <p:style>
+          <a:lnRef idx="1">
+            <a:schemeClr val="accent1"/>
+          </a:lnRef>
+          <a:fillRef idx="3">
+            <a:schemeClr val="accent1"/>
+          </a:fillRef>
+          <a:effectRef idx="2">
+            <a:schemeClr val="accent1"/>
+          </a:effectRef>
+          <a:fontRef idx="minor">
+            <a:schemeClr val="lt1"/>
+          </a:fontRef>
+        </p:style>
+        <p:txBody>
+          <a:bodyPr rtlCol="0" anchor="ctr" wrap="square"/>
+          <a:lstStyle/>
+          <a:p>
+            <a:pPr algn="ctr"/>
+          </a:p>
+        </p:txBody>
+      </p:sp>
+      <p:sp>
+        <p:nvSpPr>
+          <p:cNvPr id="72" name="TextBox 71"/>
+          <p:cNvSpPr txBox="1"/>
+          <p:nvPr/>
+        </p:nvSpPr>
+        <p:spPr>
+          <a:xfrm>
+            <a:off x="886968" y="5715000"/>
+            <a:ext cx="10451592" cy="310896"/>
+          </a:xfrm>
+          <a:prstGeom prst="rect">
+            <a:avLst/>
+          </a:prstGeom>
+          <a:noFill/>
+        </p:spPr>
+        <p:txBody>
+          <a:bodyPr wrap="square" lIns="0" rIns="0" tIns="0" bIns="0" anchor="t">
+            <a:spAutoFit/>
+          </a:bodyPr>
+          <a:lstStyle/>
+          <a:p>
+            <a:pPr algn="l">
+              <a:lnSpc>
+                <a:spcPct val="106000"/>
+              </a:lnSpc>
+              <a:spcBef>
+                <a:spcPts val="0"/>
+              </a:spcBef>
+              <a:spcAft>
+                <a:spcPts val="0"/>
+              </a:spcAft>
+            </a:pPr>
+            <a:r>
+              <a:rPr sz="1050" b="1" i="0">
+                <a:solidFill>
+                  <a:srgbClr val="0A5A62"/>
                 </a:solidFill>
                 <a:latin typeface="Segoe UI"/>
               </a:rPr>
-              <a:t>contention, a short circuit.</a:t>
-            </a:r>
-          </a:p>
-        </p:txBody>
-      </p:sp>
-      <p:sp>
-        <p:nvSpPr>
-          <p:cNvPr id="82" name="Rectangle 81"/>
+              <a:t>SAY THIS:  </a:t>
+            </a:r>
+            <a:r>
+              <a:rPr sz="1250" b="0" i="0">
+                <a:solidFill>
+                  <a:srgbClr val="11212E"/>
+                </a:solidFill>
+                <a:latin typeface="Segoe UI"/>
+              </a:rPr>
+              <a:t>A register changes only when a control signal tells it to - and only one register may drive the shared wire.</a:t>
+            </a:r>
+          </a:p>
+        </p:txBody>
+      </p:sp>
+      <p:sp>
+        <p:nvSpPr>
+          <p:cNvPr id="73" name="Rectangle 72"/>
           <p:cNvSpPr/>
           <p:nvPr/>
         </p:nvSpPr>
@@ -19721,7 +20036,7 @@
       </p:sp>
       <p:sp>
         <p:nvSpPr>
-          <p:cNvPr id="83" name="TextBox 82"/>
+          <p:cNvPr id="74" name="TextBox 73"/>
           <p:cNvSpPr txBox="1"/>
           <p:nvPr/>
         </p:nvSpPr>
@@ -19763,7 +20078,7 @@
       </p:sp>
       <p:sp>
         <p:nvSpPr>
-          <p:cNvPr id="84" name="TextBox 83"/>
+          <p:cNvPr id="75" name="TextBox 74"/>
           <p:cNvSpPr txBox="1"/>
           <p:nvPr/>
         </p:nvSpPr>
@@ -20008,11 +20323,11 @@
         <p:spPr>
           <a:xfrm>
             <a:off x="685800" y="1766951"/>
-            <a:ext cx="2331720" cy="676656"/>
+            <a:ext cx="2331720" cy="621792"/>
           </a:xfrm>
           <a:prstGeom prst="roundRect">
             <a:avLst>
-              <a:gd name="adj" fmla="val 9000"/>
+              <a:gd name="adj" fmla="val 10000"/>
             </a:avLst>
           </a:prstGeom>
           <a:solidFill>
@@ -20053,8 +20368,8 @@
         </p:nvSpPr>
         <p:spPr>
           <a:xfrm>
-            <a:off x="877824" y="1858391"/>
-            <a:ext cx="2020824" cy="256032"/>
+            <a:off x="877824" y="1840103"/>
+            <a:ext cx="2057400" cy="256032"/>
           </a:xfrm>
           <a:prstGeom prst="rect">
             <a:avLst/>
@@ -20076,7 +20391,7 @@
               </a:spcAft>
             </a:pPr>
             <a:r>
-              <a:rPr sz="1200" b="1" i="0">
+              <a:rPr sz="1150" b="1" i="0">
                 <a:solidFill>
                   <a:srgbClr val="FFFFFF"/>
                 </a:solidFill>
@@ -20095,8 +20410,8 @@
         </p:nvSpPr>
         <p:spPr>
           <a:xfrm>
-            <a:off x="877824" y="2132711"/>
-            <a:ext cx="2020824" cy="219456"/>
+            <a:off x="877824" y="2096135"/>
+            <a:ext cx="2057400" cy="219456"/>
           </a:xfrm>
           <a:prstGeom prst="rect">
             <a:avLst/>
@@ -20137,12 +20452,12 @@
         </p:nvSpPr>
         <p:spPr>
           <a:xfrm>
-            <a:off x="685800" y="2535047"/>
-            <a:ext cx="3383280" cy="676656"/>
+            <a:off x="685800" y="2461895"/>
+            <a:ext cx="3383280" cy="621792"/>
           </a:xfrm>
           <a:prstGeom prst="roundRect">
             <a:avLst>
-              <a:gd name="adj" fmla="val 9000"/>
+              <a:gd name="adj" fmla="val 10000"/>
             </a:avLst>
           </a:prstGeom>
           <a:solidFill>
@@ -20183,8 +20498,8 @@
         </p:nvSpPr>
         <p:spPr>
           <a:xfrm>
-            <a:off x="877824" y="2626487"/>
-            <a:ext cx="3072384" cy="256032"/>
+            <a:off x="877824" y="2535047"/>
+            <a:ext cx="3108960" cy="256032"/>
           </a:xfrm>
           <a:prstGeom prst="rect">
             <a:avLst/>
@@ -20206,7 +20521,7 @@
               </a:spcAft>
             </a:pPr>
             <a:r>
-              <a:rPr sz="1200" b="1" i="0">
+              <a:rPr sz="1150" b="1" i="0">
                 <a:solidFill>
                   <a:srgbClr val="FFFFFF"/>
                 </a:solidFill>
@@ -20225,8 +20540,8 @@
         </p:nvSpPr>
         <p:spPr>
           <a:xfrm>
-            <a:off x="877824" y="2900807"/>
-            <a:ext cx="3072384" cy="219456"/>
+            <a:off x="877824" y="2791079"/>
+            <a:ext cx="3108960" cy="219456"/>
           </a:xfrm>
           <a:prstGeom prst="rect">
             <a:avLst/>
@@ -20267,12 +20582,12 @@
         </p:nvSpPr>
         <p:spPr>
           <a:xfrm>
-            <a:off x="685800" y="3303143"/>
-            <a:ext cx="4434840" cy="676656"/>
+            <a:off x="685800" y="3156839"/>
+            <a:ext cx="4434840" cy="621792"/>
           </a:xfrm>
           <a:prstGeom prst="roundRect">
             <a:avLst>
-              <a:gd name="adj" fmla="val 9000"/>
+              <a:gd name="adj" fmla="val 10000"/>
             </a:avLst>
           </a:prstGeom>
           <a:solidFill>
@@ -20313,8 +20628,8 @@
         </p:nvSpPr>
         <p:spPr>
           <a:xfrm>
-            <a:off x="877824" y="3394583"/>
-            <a:ext cx="4123944" cy="256032"/>
+            <a:off x="877824" y="3229991"/>
+            <a:ext cx="4160520" cy="256032"/>
           </a:xfrm>
           <a:prstGeom prst="rect">
             <a:avLst/>
@@ -20336,7 +20651,7 @@
               </a:spcAft>
             </a:pPr>
             <a:r>
-              <a:rPr sz="1200" b="1" i="0">
+              <a:rPr sz="1150" b="1" i="0">
                 <a:solidFill>
                   <a:srgbClr val="FFFFFF"/>
                 </a:solidFill>
@@ -20355,8 +20670,8 @@
         </p:nvSpPr>
         <p:spPr>
           <a:xfrm>
-            <a:off x="877824" y="3668902"/>
-            <a:ext cx="4123944" cy="219456"/>
+            <a:off x="877824" y="3486023"/>
+            <a:ext cx="4160520" cy="219456"/>
           </a:xfrm>
           <a:prstGeom prst="rect">
             <a:avLst/>
@@ -20397,12 +20712,12 @@
         </p:nvSpPr>
         <p:spPr>
           <a:xfrm>
-            <a:off x="685800" y="4071239"/>
-            <a:ext cx="5257800" cy="676656"/>
+            <a:off x="685800" y="3851783"/>
+            <a:ext cx="5257800" cy="621792"/>
           </a:xfrm>
           <a:prstGeom prst="roundRect">
             <a:avLst>
-              <a:gd name="adj" fmla="val 9000"/>
+              <a:gd name="adj" fmla="val 10000"/>
             </a:avLst>
           </a:prstGeom>
           <a:solidFill>
@@ -20443,8 +20758,8 @@
         </p:nvSpPr>
         <p:spPr>
           <a:xfrm>
-            <a:off x="877824" y="4162679"/>
-            <a:ext cx="4946904" cy="256032"/>
+            <a:off x="877824" y="3924935"/>
+            <a:ext cx="4983480" cy="256032"/>
           </a:xfrm>
           <a:prstGeom prst="rect">
             <a:avLst/>
@@ -20466,7 +20781,7 @@
               </a:spcAft>
             </a:pPr>
             <a:r>
-              <a:rPr sz="1200" b="1" i="0">
+              <a:rPr sz="1150" b="1" i="0">
                 <a:solidFill>
                   <a:srgbClr val="FFFFFF"/>
                 </a:solidFill>
@@ -20485,8 +20800,8 @@
         </p:nvSpPr>
         <p:spPr>
           <a:xfrm>
-            <a:off x="877824" y="4436999"/>
-            <a:ext cx="4946904" cy="219456"/>
+            <a:off x="877824" y="4180967"/>
+            <a:ext cx="4983480" cy="219456"/>
           </a:xfrm>
           <a:prstGeom prst="rect">
             <a:avLst/>
@@ -20527,7 +20842,7 @@
         </p:nvSpPr>
         <p:spPr>
           <a:xfrm>
-            <a:off x="685800" y="4857623"/>
+            <a:off x="685800" y="4565014"/>
             <a:ext cx="5394960" cy="237744"/>
           </a:xfrm>
           <a:prstGeom prst="rect">
@@ -20569,8 +20884,8 @@
         </p:nvSpPr>
         <p:spPr>
           <a:xfrm>
-            <a:off x="685800" y="5205095"/>
-            <a:ext cx="5394960" cy="786384"/>
+            <a:off x="685800" y="4821047"/>
+            <a:ext cx="5394960" cy="749808"/>
           </a:xfrm>
           <a:prstGeom prst="rect">
             <a:avLst/>
@@ -20613,7 +20928,7 @@
         </p:nvSpPr>
         <p:spPr>
           <a:xfrm>
-            <a:off x="877824" y="5314823"/>
+            <a:off x="877824" y="4912487"/>
             <a:ext cx="5029200" cy="219456"/>
           </a:xfrm>
           <a:prstGeom prst="rect">
@@ -20655,7 +20970,7 @@
         </p:nvSpPr>
         <p:spPr>
           <a:xfrm>
-            <a:off x="877824" y="5534279"/>
+            <a:off x="877824" y="5131942"/>
             <a:ext cx="5029200" cy="402336"/>
           </a:xfrm>
           <a:prstGeom prst="rect">
@@ -20687,7 +21002,7 @@
                 </a:solidFill>
                 <a:latin typeface="Segoe UI"/>
               </a:rPr>
-              <a:t>A flip-flop is ~6 transistors per bit; a DRAM cell is 1 + 1 capacitor. Same bit, roughly six times the area.</a:t>
+              <a:t>A flip-flop is ~6 transistors per bit; a DRAM cell is 1 + 1 capacitor, so registers would be ~6× the area.</a:t>
             </a:r>
           </a:p>
         </p:txBody>
@@ -24596,14 +24911,14 @@
         </p:nvSpPr>
         <p:spPr>
           <a:xfrm>
-            <a:off x="6446520" y="6028055"/>
-            <a:ext cx="5074920" cy="420624"/>
+            <a:off x="685800" y="5632704"/>
+            <a:ext cx="10835640" cy="475488"/>
           </a:xfrm>
           <a:prstGeom prst="rect">
             <a:avLst/>
           </a:prstGeom>
           <a:solidFill>
-            <a:srgbClr val="E7F0F2"/>
+            <a:srgbClr val="E8F3F1"/>
           </a:solidFill>
           <a:ln>
             <a:noFill/>
@@ -24634,14 +24949,58 @@
       </p:sp>
       <p:sp>
         <p:nvSpPr>
-          <p:cNvPr id="110" name="TextBox 109"/>
-          <p:cNvSpPr txBox="1"/>
-          <p:nvPr/>
-        </p:nvSpPr>
-        <p:spPr>
-          <a:xfrm>
-            <a:off x="6620256" y="6119495"/>
-            <a:ext cx="4754880" cy="256032"/>
+          <p:cNvPr id="110" name="Rectangle 109"/>
+          <p:cNvSpPr/>
+          <p:nvPr/>
+        </p:nvSpPr>
+        <p:spPr>
+          <a:xfrm>
+            <a:off x="685800" y="5632704"/>
+            <a:ext cx="50292" cy="475488"/>
+          </a:xfrm>
+          <a:prstGeom prst="rect">
+            <a:avLst/>
+          </a:prstGeom>
+          <a:solidFill>
+            <a:srgbClr val="0E7C86"/>
+          </a:solidFill>
+          <a:ln>
+            <a:noFill/>
+          </a:ln>
+          <a:effectLst/>
+        </p:spPr>
+        <p:style>
+          <a:lnRef idx="1">
+            <a:schemeClr val="accent1"/>
+          </a:lnRef>
+          <a:fillRef idx="3">
+            <a:schemeClr val="accent1"/>
+          </a:fillRef>
+          <a:effectRef idx="2">
+            <a:schemeClr val="accent1"/>
+          </a:effectRef>
+          <a:fontRef idx="minor">
+            <a:schemeClr val="lt1"/>
+          </a:fontRef>
+        </p:style>
+        <p:txBody>
+          <a:bodyPr rtlCol="0" anchor="ctr" wrap="square"/>
+          <a:lstStyle/>
+          <a:p>
+            <a:pPr algn="ctr"/>
+          </a:p>
+        </p:txBody>
+      </p:sp>
+      <p:sp>
+        <p:nvSpPr>
+          <p:cNvPr id="111" name="TextBox 110"/>
+          <p:cNvSpPr txBox="1"/>
+          <p:nvPr/>
+        </p:nvSpPr>
+        <p:spPr>
+          <a:xfrm>
+            <a:off x="886968" y="5715000"/>
+            <a:ext cx="10451592" cy="310896"/>
           </a:xfrm>
           <a:prstGeom prst="rect">
             <a:avLst/>
@@ -24655,37 +25014,40 @@
           <a:lstStyle/>
           <a:p>
             <a:pPr algn="l">
-              <a:spcBef>
-                <a:spcPts val="0"/>
-              </a:spcBef>
-              <a:spcAft>
-                <a:spcPts val="0"/>
-              </a:spcAft>
-            </a:pPr>
-            <a:r>
-              <a:rPr sz="1000" b="0" i="0">
-                <a:solidFill>
-                  <a:srgbClr val="4A5A69"/>
+              <a:lnSpc>
+                <a:spcPct val="106000"/>
+              </a:lnSpc>
+              <a:spcBef>
+                <a:spcPts val="0"/>
+              </a:spcBef>
+              <a:spcAft>
+                <a:spcPts val="0"/>
+              </a:spcAft>
+            </a:pPr>
+            <a:r>
+              <a:rPr sz="1050" b="1" i="0">
+                <a:solidFill>
+                  <a:srgbClr val="0A5A62"/>
                 </a:solidFill>
                 <a:latin typeface="Segoe UI"/>
               </a:rPr>
-              <a:t>Same eight flip-flops every time — </a:t>
-            </a:r>
-            <a:r>
-              <a:rPr sz="1000" b="1" i="0">
-                <a:solidFill>
-                  <a:srgbClr val="0A5A62"/>
+              <a:t>SAY THIS:  </a:t>
+            </a:r>
+            <a:r>
+              <a:rPr sz="1250" b="0" i="0">
+                <a:solidFill>
+                  <a:srgbClr val="11212E"/>
                 </a:solidFill>
                 <a:latin typeface="Segoe UI"/>
               </a:rPr>
-              <a:t>only the control signals changed.</a:t>
-            </a:r>
-          </a:p>
-        </p:txBody>
-      </p:sp>
-      <p:sp>
-        <p:nvSpPr>
-          <p:cNvPr id="111" name="Rectangle 110"/>
+              <a:t>Registers are the fastest and smallest storage, because they are built from flip-flops.</a:t>
+            </a:r>
+          </a:p>
+        </p:txBody>
+      </p:sp>
+      <p:sp>
+        <p:nvSpPr>
+          <p:cNvPr id="112" name="Rectangle 111"/>
           <p:cNvSpPr/>
           <p:nvPr/>
         </p:nvSpPr>
@@ -24729,7 +25091,7 @@
       </p:sp>
       <p:sp>
         <p:nvSpPr>
-          <p:cNvPr id="112" name="TextBox 111"/>
+          <p:cNvPr id="113" name="TextBox 112"/>
           <p:cNvSpPr txBox="1"/>
           <p:nvPr/>
         </p:nvSpPr>
@@ -24771,7 +25133,7 @@
       </p:sp>
       <p:sp>
         <p:nvSpPr>
-          <p:cNvPr id="113" name="TextBox 112"/>
+          <p:cNvPr id="114" name="TextBox 113"/>
           <p:cNvSpPr txBox="1"/>
           <p:nvPr/>
         </p:nvSpPr>
@@ -24933,8 +25295,8 @@
         </p:nvSpPr>
         <p:spPr>
           <a:xfrm>
-            <a:off x="822960" y="932688"/>
-            <a:ext cx="6766560" cy="475488"/>
+            <a:off x="822960" y="896112"/>
+            <a:ext cx="6766560" cy="530352"/>
           </a:xfrm>
           <a:prstGeom prst="rect">
             <a:avLst/>
@@ -24976,7 +25338,7 @@
         <p:spPr>
           <a:xfrm>
             <a:off x="822960" y="1481328"/>
-            <a:ext cx="6766560" cy="274320"/>
+            <a:ext cx="4846320" cy="274320"/>
           </a:xfrm>
           <a:prstGeom prst="rect">
             <a:avLst/>
@@ -24998,718 +25360,31 @@
               </a:spcAft>
             </a:pPr>
             <a:r>
-              <a:rPr sz="1400" b="0" i="0">
+              <a:rPr sz="1300" b="0" i="0">
                 <a:solidFill>
                   <a:srgbClr val="B6C7CF"/>
                 </a:solidFill>
                 <a:latin typeface="Segoe UI"/>
               </a:rPr>
-              <a:t>Five sentences that carry the whole topic.</a:t>
-            </a:r>
-          </a:p>
-        </p:txBody>
-      </p:sp>
-      <p:sp>
-        <p:nvSpPr>
-          <p:cNvPr id="6" name="TextBox 5"/>
-          <p:cNvSpPr txBox="1"/>
-          <p:nvPr/>
-        </p:nvSpPr>
-        <p:spPr>
-          <a:xfrm>
-            <a:off x="822960" y="1883664"/>
-            <a:ext cx="475488" cy="237744"/>
-          </a:xfrm>
-          <a:prstGeom prst="rect">
-            <a:avLst/>
-          </a:prstGeom>
-          <a:noFill/>
-        </p:spPr>
-        <p:txBody>
-          <a:bodyPr wrap="square" lIns="0" rIns="0" tIns="0" bIns="0" anchor="t">
-            <a:spAutoFit/>
-          </a:bodyPr>
-          <a:lstStyle/>
-          <a:p>
-            <a:pPr algn="l">
-              <a:spcBef>
-                <a:spcPts val="0"/>
-              </a:spcBef>
-              <a:spcAft>
-                <a:spcPts val="0"/>
-              </a:spcAft>
-            </a:pPr>
-            <a:r>
-              <a:rPr sz="1100" b="1" i="0">
-                <a:solidFill>
-                  <a:srgbClr val="71C8C1"/>
-                </a:solidFill>
-                <a:latin typeface="Segoe UI Semibold"/>
-              </a:rPr>
-              <a:t>01</a:t>
-            </a:r>
-          </a:p>
-        </p:txBody>
-      </p:sp>
-      <p:sp>
-        <p:nvSpPr>
-          <p:cNvPr id="7" name="TextBox 6"/>
-          <p:cNvSpPr txBox="1"/>
-          <p:nvPr/>
-        </p:nvSpPr>
-        <p:spPr>
-          <a:xfrm>
-            <a:off x="1389888" y="1847088"/>
-            <a:ext cx="5120640" cy="256032"/>
-          </a:xfrm>
-          <a:prstGeom prst="rect">
-            <a:avLst/>
-          </a:prstGeom>
-          <a:noFill/>
-        </p:spPr>
-        <p:txBody>
-          <a:bodyPr wrap="square" lIns="0" rIns="0" tIns="0" bIns="0" anchor="t">
-            <a:spAutoFit/>
-          </a:bodyPr>
-          <a:lstStyle/>
-          <a:p>
-            <a:pPr algn="l">
-              <a:spcBef>
-                <a:spcPts val="0"/>
-              </a:spcBef>
-              <a:spcAft>
-                <a:spcPts val="0"/>
-              </a:spcAft>
-            </a:pPr>
-            <a:r>
-              <a:rPr sz="1250" b="1" i="0">
-                <a:solidFill>
-                  <a:srgbClr val="FFFFFF"/>
-                </a:solidFill>
-                <a:latin typeface="Segoe UI"/>
-              </a:rPr>
-              <a:t>Binary is a hardware decision.</a:t>
-            </a:r>
-          </a:p>
-        </p:txBody>
-      </p:sp>
-      <p:sp>
-        <p:nvSpPr>
-          <p:cNvPr id="8" name="TextBox 7"/>
-          <p:cNvSpPr txBox="1"/>
-          <p:nvPr/>
-        </p:nvSpPr>
-        <p:spPr>
-          <a:xfrm>
-            <a:off x="1389888" y="2121408"/>
-            <a:ext cx="5120640" cy="384048"/>
-          </a:xfrm>
-          <a:prstGeom prst="rect">
-            <a:avLst/>
-          </a:prstGeom>
-          <a:noFill/>
-        </p:spPr>
-        <p:txBody>
-          <a:bodyPr wrap="square" lIns="0" rIns="0" tIns="0" bIns="0" anchor="t">
-            <a:spAutoFit/>
-          </a:bodyPr>
-          <a:lstStyle/>
-          <a:p>
-            <a:pPr algn="l">
-              <a:lnSpc>
-                <a:spcPct val="110000"/>
-              </a:lnSpc>
-              <a:spcBef>
-                <a:spcPts val="0"/>
-              </a:spcBef>
-              <a:spcAft>
-                <a:spcPts val="0"/>
-              </a:spcAft>
-            </a:pPr>
-            <a:r>
-              <a:rPr sz="1000" b="0" i="0">
-                <a:solidFill>
-                  <a:srgbClr val="9FB6C0"/>
-                </a:solidFill>
-                <a:latin typeface="Segoe UI"/>
-              </a:rPr>
-              <a:t>Two stable states are cheap, fast and noise-tolerant; n bits give 2ⁿ patterns.</a:t>
-            </a:r>
-          </a:p>
-        </p:txBody>
-      </p:sp>
-      <p:sp>
-        <p:nvSpPr>
-          <p:cNvPr id="9" name="TextBox 8"/>
-          <p:cNvSpPr txBox="1"/>
-          <p:nvPr/>
-        </p:nvSpPr>
-        <p:spPr>
-          <a:xfrm>
-            <a:off x="822960" y="2688336"/>
-            <a:ext cx="475488" cy="237744"/>
-          </a:xfrm>
-          <a:prstGeom prst="rect">
-            <a:avLst/>
-          </a:prstGeom>
-          <a:noFill/>
-        </p:spPr>
-        <p:txBody>
-          <a:bodyPr wrap="square" lIns="0" rIns="0" tIns="0" bIns="0" anchor="t">
-            <a:spAutoFit/>
-          </a:bodyPr>
-          <a:lstStyle/>
-          <a:p>
-            <a:pPr algn="l">
-              <a:spcBef>
-                <a:spcPts val="0"/>
-              </a:spcBef>
-              <a:spcAft>
-                <a:spcPts val="0"/>
-              </a:spcAft>
-            </a:pPr>
-            <a:r>
-              <a:rPr sz="1100" b="1" i="0">
-                <a:solidFill>
-                  <a:srgbClr val="71C8C1"/>
-                </a:solidFill>
-                <a:latin typeface="Segoe UI Semibold"/>
-              </a:rPr>
-              <a:t>02</a:t>
-            </a:r>
-          </a:p>
-        </p:txBody>
-      </p:sp>
-      <p:sp>
-        <p:nvSpPr>
-          <p:cNvPr id="10" name="TextBox 9"/>
-          <p:cNvSpPr txBox="1"/>
-          <p:nvPr/>
-        </p:nvSpPr>
-        <p:spPr>
-          <a:xfrm>
-            <a:off x="1389888" y="2651760"/>
-            <a:ext cx="5120640" cy="256032"/>
-          </a:xfrm>
-          <a:prstGeom prst="rect">
-            <a:avLst/>
-          </a:prstGeom>
-          <a:noFill/>
-        </p:spPr>
-        <p:txBody>
-          <a:bodyPr wrap="square" lIns="0" rIns="0" tIns="0" bIns="0" anchor="t">
-            <a:spAutoFit/>
-          </a:bodyPr>
-          <a:lstStyle/>
-          <a:p>
-            <a:pPr algn="l">
-              <a:spcBef>
-                <a:spcPts val="0"/>
-              </a:spcBef>
-              <a:spcAft>
-                <a:spcPts val="0"/>
-              </a:spcAft>
-            </a:pPr>
-            <a:r>
-              <a:rPr sz="1250" b="1" i="0">
-                <a:solidFill>
-                  <a:srgbClr val="FFFFFF"/>
-                </a:solidFill>
-                <a:latin typeface="Segoe UI"/>
-              </a:rPr>
-              <a:t>A bit is held by a bistable circuit.</a:t>
-            </a:r>
-          </a:p>
-        </p:txBody>
-      </p:sp>
-      <p:sp>
-        <p:nvSpPr>
-          <p:cNvPr id="11" name="TextBox 10"/>
-          <p:cNvSpPr txBox="1"/>
-          <p:nvPr/>
-        </p:nvSpPr>
-        <p:spPr>
-          <a:xfrm>
-            <a:off x="1389888" y="2926080"/>
-            <a:ext cx="5120640" cy="384048"/>
-          </a:xfrm>
-          <a:prstGeom prst="rect">
-            <a:avLst/>
-          </a:prstGeom>
-          <a:noFill/>
-        </p:spPr>
-        <p:txBody>
-          <a:bodyPr wrap="square" lIns="0" rIns="0" tIns="0" bIns="0" anchor="t">
-            <a:spAutoFit/>
-          </a:bodyPr>
-          <a:lstStyle/>
-          <a:p>
-            <a:pPr algn="l">
-              <a:lnSpc>
-                <a:spcPct val="110000"/>
-              </a:lnSpc>
-              <a:spcBef>
-                <a:spcPts val="0"/>
-              </a:spcBef>
-              <a:spcAft>
-                <a:spcPts val="0"/>
-              </a:spcAft>
-            </a:pPr>
-            <a:r>
-              <a:rPr sz="1000" b="0" i="0">
-                <a:solidFill>
-                  <a:srgbClr val="9FB6C0"/>
-                </a:solidFill>
-                <a:latin typeface="Segoe UI"/>
-              </a:rPr>
-              <a:t>Flip-flops for speed in the CPU, capacitors for density in DRAM.</a:t>
-            </a:r>
-          </a:p>
-        </p:txBody>
-      </p:sp>
-      <p:sp>
-        <p:nvSpPr>
-          <p:cNvPr id="12" name="TextBox 11"/>
-          <p:cNvSpPr txBox="1"/>
-          <p:nvPr/>
-        </p:nvSpPr>
-        <p:spPr>
-          <a:xfrm>
-            <a:off x="822960" y="3493008"/>
-            <a:ext cx="475488" cy="237744"/>
-          </a:xfrm>
-          <a:prstGeom prst="rect">
-            <a:avLst/>
-          </a:prstGeom>
-          <a:noFill/>
-        </p:spPr>
-        <p:txBody>
-          <a:bodyPr wrap="square" lIns="0" rIns="0" tIns="0" bIns="0" anchor="t">
-            <a:spAutoFit/>
-          </a:bodyPr>
-          <a:lstStyle/>
-          <a:p>
-            <a:pPr algn="l">
-              <a:spcBef>
-                <a:spcPts val="0"/>
-              </a:spcBef>
-              <a:spcAft>
-                <a:spcPts val="0"/>
-              </a:spcAft>
-            </a:pPr>
-            <a:r>
-              <a:rPr sz="1100" b="1" i="0">
-                <a:solidFill>
-                  <a:srgbClr val="71C8C1"/>
-                </a:solidFill>
-                <a:latin typeface="Segoe UI Semibold"/>
-              </a:rPr>
-              <a:t>03</a:t>
-            </a:r>
-          </a:p>
-        </p:txBody>
-      </p:sp>
-      <p:sp>
-        <p:nvSpPr>
-          <p:cNvPr id="13" name="TextBox 12"/>
-          <p:cNvSpPr txBox="1"/>
-          <p:nvPr/>
-        </p:nvSpPr>
-        <p:spPr>
-          <a:xfrm>
-            <a:off x="1389888" y="3456432"/>
-            <a:ext cx="5120640" cy="256032"/>
-          </a:xfrm>
-          <a:prstGeom prst="rect">
-            <a:avLst/>
-          </a:prstGeom>
-          <a:noFill/>
-        </p:spPr>
-        <p:txBody>
-          <a:bodyPr wrap="square" lIns="0" rIns="0" tIns="0" bIns="0" anchor="t">
-            <a:spAutoFit/>
-          </a:bodyPr>
-          <a:lstStyle/>
-          <a:p>
-            <a:pPr algn="l">
-              <a:spcBef>
-                <a:spcPts val="0"/>
-              </a:spcBef>
-              <a:spcAft>
-                <a:spcPts val="0"/>
-              </a:spcAft>
-            </a:pPr>
-            <a:r>
-              <a:rPr sz="1250" b="1" i="0">
-                <a:solidFill>
-                  <a:srgbClr val="FFFFFF"/>
-                </a:solidFill>
-                <a:latin typeface="Segoe UI"/>
-              </a:rPr>
-              <a:t>A register is n flip-flops on one clock.</a:t>
-            </a:r>
-          </a:p>
-        </p:txBody>
-      </p:sp>
-      <p:sp>
-        <p:nvSpPr>
-          <p:cNvPr id="14" name="TextBox 13"/>
-          <p:cNvSpPr txBox="1"/>
-          <p:nvPr/>
-        </p:nvSpPr>
-        <p:spPr>
-          <a:xfrm>
-            <a:off x="1389888" y="3730752"/>
-            <a:ext cx="5120640" cy="384048"/>
-          </a:xfrm>
-          <a:prstGeom prst="rect">
-            <a:avLst/>
-          </a:prstGeom>
-          <a:noFill/>
-        </p:spPr>
-        <p:txBody>
-          <a:bodyPr wrap="square" lIns="0" rIns="0" tIns="0" bIns="0" anchor="t">
-            <a:spAutoFit/>
-          </a:bodyPr>
-          <a:lstStyle/>
-          <a:p>
-            <a:pPr algn="l">
-              <a:lnSpc>
-                <a:spcPct val="110000"/>
-              </a:lnSpc>
-              <a:spcBef>
-                <a:spcPts val="0"/>
-              </a:spcBef>
-              <a:spcAft>
-                <a:spcPts val="0"/>
-              </a:spcAft>
-            </a:pPr>
-            <a:r>
-              <a:rPr sz="1000" b="0" i="0">
-                <a:solidFill>
-                  <a:srgbClr val="9FB6C0"/>
-                </a:solidFill>
-                <a:latin typeface="Segoe UI"/>
-              </a:rPr>
-              <a:t>All bits update together, so a word is never read half-written.</a:t>
-            </a:r>
-          </a:p>
-        </p:txBody>
-      </p:sp>
-      <p:sp>
-        <p:nvSpPr>
-          <p:cNvPr id="15" name="TextBox 14"/>
-          <p:cNvSpPr txBox="1"/>
-          <p:nvPr/>
-        </p:nvSpPr>
-        <p:spPr>
-          <a:xfrm>
-            <a:off x="822960" y="4297680"/>
-            <a:ext cx="475488" cy="237744"/>
-          </a:xfrm>
-          <a:prstGeom prst="rect">
-            <a:avLst/>
-          </a:prstGeom>
-          <a:noFill/>
-        </p:spPr>
-        <p:txBody>
-          <a:bodyPr wrap="square" lIns="0" rIns="0" tIns="0" bIns="0" anchor="t">
-            <a:spAutoFit/>
-          </a:bodyPr>
-          <a:lstStyle/>
-          <a:p>
-            <a:pPr algn="l">
-              <a:spcBef>
-                <a:spcPts val="0"/>
-              </a:spcBef>
-              <a:spcAft>
-                <a:spcPts val="0"/>
-              </a:spcAft>
-            </a:pPr>
-            <a:r>
-              <a:rPr sz="1100" b="1" i="0">
-                <a:solidFill>
-                  <a:srgbClr val="71C8C1"/>
-                </a:solidFill>
-                <a:latin typeface="Segoe UI Semibold"/>
-              </a:rPr>
-              <a:t>04</a:t>
-            </a:r>
-          </a:p>
-        </p:txBody>
-      </p:sp>
-      <p:sp>
-        <p:nvSpPr>
-          <p:cNvPr id="16" name="TextBox 15"/>
-          <p:cNvSpPr txBox="1"/>
-          <p:nvPr/>
-        </p:nvSpPr>
-        <p:spPr>
-          <a:xfrm>
-            <a:off x="1389888" y="4261104"/>
-            <a:ext cx="5120640" cy="256032"/>
-          </a:xfrm>
-          <a:prstGeom prst="rect">
-            <a:avLst/>
-          </a:prstGeom>
-          <a:noFill/>
-        </p:spPr>
-        <p:txBody>
-          <a:bodyPr wrap="square" lIns="0" rIns="0" tIns="0" bIns="0" anchor="t">
-            <a:spAutoFit/>
-          </a:bodyPr>
-          <a:lstStyle/>
-          <a:p>
-            <a:pPr algn="l">
-              <a:spcBef>
-                <a:spcPts val="0"/>
-              </a:spcBef>
-              <a:spcAft>
-                <a:spcPts val="0"/>
-              </a:spcAft>
-            </a:pPr>
-            <a:r>
-              <a:rPr sz="1250" b="1" i="0">
-                <a:solidFill>
-                  <a:srgbClr val="FFFFFF"/>
-                </a:solidFill>
-                <a:latin typeface="Segoe UI"/>
-              </a:rPr>
-              <a:t>Control signals decide what happens.</a:t>
-            </a:r>
-          </a:p>
-        </p:txBody>
-      </p:sp>
-      <p:sp>
-        <p:nvSpPr>
-          <p:cNvPr id="17" name="TextBox 16"/>
-          <p:cNvSpPr txBox="1"/>
-          <p:nvPr/>
-        </p:nvSpPr>
-        <p:spPr>
-          <a:xfrm>
-            <a:off x="1389888" y="4535424"/>
-            <a:ext cx="5120640" cy="384048"/>
-          </a:xfrm>
-          <a:prstGeom prst="rect">
-            <a:avLst/>
-          </a:prstGeom>
-          <a:noFill/>
-        </p:spPr>
-        <p:txBody>
-          <a:bodyPr wrap="square" lIns="0" rIns="0" tIns="0" bIns="0" anchor="t">
-            <a:spAutoFit/>
-          </a:bodyPr>
-          <a:lstStyle/>
-          <a:p>
-            <a:pPr algn="l">
-              <a:lnSpc>
-                <a:spcPct val="110000"/>
-              </a:lnSpc>
-              <a:spcBef>
-                <a:spcPts val="0"/>
-              </a:spcBef>
-              <a:spcAft>
-                <a:spcPts val="0"/>
-              </a:spcAft>
-            </a:pPr>
-            <a:r>
-              <a:rPr sz="1000" b="0" i="0">
-                <a:solidFill>
-                  <a:srgbClr val="9FB6C0"/>
-                </a:solidFill>
-                <a:latin typeface="Segoe UI"/>
-              </a:rPr>
-              <a:t>Load to write, shift to move, tri-state enables to share one bus.</a:t>
-            </a:r>
-          </a:p>
-        </p:txBody>
-      </p:sp>
-      <p:sp>
-        <p:nvSpPr>
-          <p:cNvPr id="18" name="TextBox 17"/>
-          <p:cNvSpPr txBox="1"/>
-          <p:nvPr/>
-        </p:nvSpPr>
-        <p:spPr>
-          <a:xfrm>
-            <a:off x="822960" y="5102352"/>
-            <a:ext cx="475488" cy="237744"/>
-          </a:xfrm>
-          <a:prstGeom prst="rect">
-            <a:avLst/>
-          </a:prstGeom>
-          <a:noFill/>
-        </p:spPr>
-        <p:txBody>
-          <a:bodyPr wrap="square" lIns="0" rIns="0" tIns="0" bIns="0" anchor="t">
-            <a:spAutoFit/>
-          </a:bodyPr>
-          <a:lstStyle/>
-          <a:p>
-            <a:pPr algn="l">
-              <a:spcBef>
-                <a:spcPts val="0"/>
-              </a:spcBef>
-              <a:spcAft>
-                <a:spcPts val="0"/>
-              </a:spcAft>
-            </a:pPr>
-            <a:r>
-              <a:rPr sz="1100" b="1" i="0">
-                <a:solidFill>
-                  <a:srgbClr val="71C8C1"/>
-                </a:solidFill>
-                <a:latin typeface="Segoe UI Semibold"/>
-              </a:rPr>
-              <a:t>05</a:t>
-            </a:r>
-          </a:p>
-        </p:txBody>
-      </p:sp>
-      <p:sp>
-        <p:nvSpPr>
-          <p:cNvPr id="19" name="TextBox 18"/>
-          <p:cNvSpPr txBox="1"/>
-          <p:nvPr/>
-        </p:nvSpPr>
-        <p:spPr>
-          <a:xfrm>
-            <a:off x="1389888" y="5065776"/>
-            <a:ext cx="5120640" cy="256032"/>
-          </a:xfrm>
-          <a:prstGeom prst="rect">
-            <a:avLst/>
-          </a:prstGeom>
-          <a:noFill/>
-        </p:spPr>
-        <p:txBody>
-          <a:bodyPr wrap="square" lIns="0" rIns="0" tIns="0" bIns="0" anchor="t">
-            <a:spAutoFit/>
-          </a:bodyPr>
-          <a:lstStyle/>
-          <a:p>
-            <a:pPr algn="l">
-              <a:spcBef>
-                <a:spcPts val="0"/>
-              </a:spcBef>
-              <a:spcAft>
-                <a:spcPts val="0"/>
-              </a:spcAft>
-            </a:pPr>
-            <a:r>
-              <a:rPr sz="1250" b="1" i="0">
-                <a:solidFill>
-                  <a:srgbClr val="FFFFFF"/>
-                </a:solidFill>
-                <a:latin typeface="Segoe UI"/>
-              </a:rPr>
-              <a:t>Registers top the hierarchy.</a:t>
-            </a:r>
-          </a:p>
-        </p:txBody>
-      </p:sp>
-      <p:sp>
-        <p:nvSpPr>
-          <p:cNvPr id="20" name="TextBox 19"/>
-          <p:cNvSpPr txBox="1"/>
-          <p:nvPr/>
-        </p:nvSpPr>
-        <p:spPr>
-          <a:xfrm>
-            <a:off x="1389888" y="5340096"/>
-            <a:ext cx="5120640" cy="384048"/>
-          </a:xfrm>
-          <a:prstGeom prst="rect">
-            <a:avLst/>
-          </a:prstGeom>
-          <a:noFill/>
-        </p:spPr>
-        <p:txBody>
-          <a:bodyPr wrap="square" lIns="0" rIns="0" tIns="0" bIns="0" anchor="t">
-            <a:spAutoFit/>
-          </a:bodyPr>
-          <a:lstStyle/>
-          <a:p>
-            <a:pPr algn="l">
-              <a:lnSpc>
-                <a:spcPct val="110000"/>
-              </a:lnSpc>
-              <a:spcBef>
-                <a:spcPts val="0"/>
-              </a:spcBef>
-              <a:spcAft>
-                <a:spcPts val="0"/>
-              </a:spcAft>
-            </a:pPr>
-            <a:r>
-              <a:rPr sz="1000" b="0" i="0">
-                <a:solidFill>
-                  <a:srgbClr val="9FB6C0"/>
-                </a:solidFill>
-                <a:latin typeface="Segoe UI"/>
-              </a:rPr>
-              <a:t>Fast and small because they are flip-flops; memory is big and slow by design.</a:t>
-            </a:r>
-          </a:p>
-        </p:txBody>
-      </p:sp>
-      <p:sp>
-        <p:nvSpPr>
-          <p:cNvPr id="21" name="TextBox 20"/>
-          <p:cNvSpPr txBox="1"/>
-          <p:nvPr/>
-        </p:nvSpPr>
-        <p:spPr>
-          <a:xfrm>
-            <a:off x="6903720" y="1847088"/>
-            <a:ext cx="4480560" cy="237744"/>
-          </a:xfrm>
-          <a:prstGeom prst="rect">
-            <a:avLst/>
-          </a:prstGeom>
-          <a:noFill/>
-        </p:spPr>
-        <p:txBody>
-          <a:bodyPr wrap="square" lIns="0" rIns="0" tIns="0" bIns="0" anchor="t">
-            <a:spAutoFit/>
-          </a:bodyPr>
-          <a:lstStyle/>
-          <a:p>
-            <a:pPr algn="l">
-              <a:spcBef>
-                <a:spcPts val="0"/>
-              </a:spcBef>
-              <a:spcAft>
-                <a:spcPts val="0"/>
-              </a:spcAft>
-            </a:pPr>
-            <a:r>
-              <a:rPr sz="950" b="1" i="0">
-                <a:solidFill>
-                  <a:srgbClr val="71C8C1"/>
-                </a:solidFill>
-                <a:latin typeface="Segoe UI Semibold"/>
-              </a:rPr>
-              <a:t>LIKELY QUESTIONS</a:t>
-            </a:r>
-          </a:p>
-        </p:txBody>
-      </p:sp>
-      <p:sp>
-        <p:nvSpPr>
-          <p:cNvPr id="22" name="Rounded Rectangle 21"/>
+              <a:t>Five sentences that carry the topic.</a:t>
+            </a:r>
+          </a:p>
+        </p:txBody>
+      </p:sp>
+      <p:sp>
+        <p:nvSpPr>
+          <p:cNvPr id="6" name="Rounded Rectangle 5"/>
           <p:cNvSpPr/>
           <p:nvPr/>
         </p:nvSpPr>
         <p:spPr>
           <a:xfrm>
-            <a:off x="6903720" y="2157984"/>
-            <a:ext cx="4480560" cy="603504"/>
+            <a:off x="822960" y="1792224"/>
+            <a:ext cx="5623560" cy="457200"/>
           </a:xfrm>
           <a:prstGeom prst="roundRect">
             <a:avLst>
-              <a:gd name="adj" fmla="val 12000"/>
+              <a:gd name="adj" fmla="val 16000"/>
             </a:avLst>
           </a:prstGeom>
           <a:solidFill>
@@ -25744,14 +25419,710 @@
       </p:sp>
       <p:sp>
         <p:nvSpPr>
+          <p:cNvPr id="7" name="TextBox 6"/>
+          <p:cNvSpPr txBox="1"/>
+          <p:nvPr/>
+        </p:nvSpPr>
+        <p:spPr>
+          <a:xfrm>
+            <a:off x="969264" y="1892807"/>
+            <a:ext cx="5349240" cy="256032"/>
+          </a:xfrm>
+          <a:prstGeom prst="rect">
+            <a:avLst/>
+          </a:prstGeom>
+          <a:noFill/>
+        </p:spPr>
+        <p:txBody>
+          <a:bodyPr wrap="square" lIns="0" rIns="0" tIns="0" bIns="0" anchor="t">
+            <a:spAutoFit/>
+          </a:bodyPr>
+          <a:lstStyle/>
+          <a:p>
+            <a:pPr algn="l">
+              <a:spcBef>
+                <a:spcPts val="0"/>
+              </a:spcBef>
+              <a:spcAft>
+                <a:spcPts val="0"/>
+              </a:spcAft>
+            </a:pPr>
+            <a:r>
+              <a:rPr sz="950" b="1" i="0">
+                <a:solidFill>
+                  <a:srgbClr val="71C8C1"/>
+                </a:solidFill>
+                <a:latin typeface="Segoe UI"/>
+              </a:rPr>
+              <a:t>SAY THIS:  </a:t>
+            </a:r>
+            <a:r>
+              <a:rPr sz="1100" b="0" i="0">
+                <a:solidFill>
+                  <a:srgbClr val="FFFFFF"/>
+                </a:solidFill>
+                <a:latin typeface="Segoe UI"/>
+              </a:rPr>
+              <a:t>binary, the bit cell, the register, the switches.</a:t>
+            </a:r>
+          </a:p>
+        </p:txBody>
+      </p:sp>
+      <p:sp>
+        <p:nvSpPr>
+          <p:cNvPr id="8" name="TextBox 7"/>
+          <p:cNvSpPr txBox="1"/>
+          <p:nvPr/>
+        </p:nvSpPr>
+        <p:spPr>
+          <a:xfrm>
+            <a:off x="822960" y="2432304"/>
+            <a:ext cx="475488" cy="237744"/>
+          </a:xfrm>
+          <a:prstGeom prst="rect">
+            <a:avLst/>
+          </a:prstGeom>
+          <a:noFill/>
+        </p:spPr>
+        <p:txBody>
+          <a:bodyPr wrap="square" lIns="0" rIns="0" tIns="0" bIns="0" anchor="t">
+            <a:spAutoFit/>
+          </a:bodyPr>
+          <a:lstStyle/>
+          <a:p>
+            <a:pPr algn="l">
+              <a:spcBef>
+                <a:spcPts val="0"/>
+              </a:spcBef>
+              <a:spcAft>
+                <a:spcPts val="0"/>
+              </a:spcAft>
+            </a:pPr>
+            <a:r>
+              <a:rPr sz="1100" b="1" i="0">
+                <a:solidFill>
+                  <a:srgbClr val="71C8C1"/>
+                </a:solidFill>
+                <a:latin typeface="Segoe UI Semibold"/>
+              </a:rPr>
+              <a:t>01</a:t>
+            </a:r>
+          </a:p>
+        </p:txBody>
+      </p:sp>
+      <p:sp>
+        <p:nvSpPr>
+          <p:cNvPr id="9" name="TextBox 8"/>
+          <p:cNvSpPr txBox="1"/>
+          <p:nvPr/>
+        </p:nvSpPr>
+        <p:spPr>
+          <a:xfrm>
+            <a:off x="1389888" y="2395728"/>
+            <a:ext cx="5120640" cy="256032"/>
+          </a:xfrm>
+          <a:prstGeom prst="rect">
+            <a:avLst/>
+          </a:prstGeom>
+          <a:noFill/>
+        </p:spPr>
+        <p:txBody>
+          <a:bodyPr wrap="square" lIns="0" rIns="0" tIns="0" bIns="0" anchor="t">
+            <a:spAutoFit/>
+          </a:bodyPr>
+          <a:lstStyle/>
+          <a:p>
+            <a:pPr algn="l">
+              <a:spcBef>
+                <a:spcPts val="0"/>
+              </a:spcBef>
+              <a:spcAft>
+                <a:spcPts val="0"/>
+              </a:spcAft>
+            </a:pPr>
+            <a:r>
+              <a:rPr sz="1250" b="1" i="0">
+                <a:solidFill>
+                  <a:srgbClr val="FFFFFF"/>
+                </a:solidFill>
+                <a:latin typeface="Segoe UI"/>
+              </a:rPr>
+              <a:t>Binary is a hardware decision.</a:t>
+            </a:r>
+          </a:p>
+        </p:txBody>
+      </p:sp>
+      <p:sp>
+        <p:nvSpPr>
+          <p:cNvPr id="10" name="TextBox 9"/>
+          <p:cNvSpPr txBox="1"/>
+          <p:nvPr/>
+        </p:nvSpPr>
+        <p:spPr>
+          <a:xfrm>
+            <a:off x="1389888" y="2670048"/>
+            <a:ext cx="5120640" cy="384048"/>
+          </a:xfrm>
+          <a:prstGeom prst="rect">
+            <a:avLst/>
+          </a:prstGeom>
+          <a:noFill/>
+        </p:spPr>
+        <p:txBody>
+          <a:bodyPr wrap="square" lIns="0" rIns="0" tIns="0" bIns="0" anchor="t">
+            <a:spAutoFit/>
+          </a:bodyPr>
+          <a:lstStyle/>
+          <a:p>
+            <a:pPr algn="l">
+              <a:lnSpc>
+                <a:spcPct val="110000"/>
+              </a:lnSpc>
+              <a:spcBef>
+                <a:spcPts val="0"/>
+              </a:spcBef>
+              <a:spcAft>
+                <a:spcPts val="0"/>
+              </a:spcAft>
+            </a:pPr>
+            <a:r>
+              <a:rPr sz="1000" b="0" i="0">
+                <a:solidFill>
+                  <a:srgbClr val="9FB6C0"/>
+                </a:solidFill>
+                <a:latin typeface="Segoe UI"/>
+              </a:rPr>
+              <a:t>Two stable states are cheap, fast and noise-tolerant; n bits give 2ⁿ patterns.</a:t>
+            </a:r>
+          </a:p>
+        </p:txBody>
+      </p:sp>
+      <p:sp>
+        <p:nvSpPr>
+          <p:cNvPr id="11" name="TextBox 10"/>
+          <p:cNvSpPr txBox="1"/>
+          <p:nvPr/>
+        </p:nvSpPr>
+        <p:spPr>
+          <a:xfrm>
+            <a:off x="822960" y="3163824"/>
+            <a:ext cx="475488" cy="237744"/>
+          </a:xfrm>
+          <a:prstGeom prst="rect">
+            <a:avLst/>
+          </a:prstGeom>
+          <a:noFill/>
+        </p:spPr>
+        <p:txBody>
+          <a:bodyPr wrap="square" lIns="0" rIns="0" tIns="0" bIns="0" anchor="t">
+            <a:spAutoFit/>
+          </a:bodyPr>
+          <a:lstStyle/>
+          <a:p>
+            <a:pPr algn="l">
+              <a:spcBef>
+                <a:spcPts val="0"/>
+              </a:spcBef>
+              <a:spcAft>
+                <a:spcPts val="0"/>
+              </a:spcAft>
+            </a:pPr>
+            <a:r>
+              <a:rPr sz="1100" b="1" i="0">
+                <a:solidFill>
+                  <a:srgbClr val="71C8C1"/>
+                </a:solidFill>
+                <a:latin typeface="Segoe UI Semibold"/>
+              </a:rPr>
+              <a:t>02</a:t>
+            </a:r>
+          </a:p>
+        </p:txBody>
+      </p:sp>
+      <p:sp>
+        <p:nvSpPr>
+          <p:cNvPr id="12" name="TextBox 11"/>
+          <p:cNvSpPr txBox="1"/>
+          <p:nvPr/>
+        </p:nvSpPr>
+        <p:spPr>
+          <a:xfrm>
+            <a:off x="1389888" y="3127248"/>
+            <a:ext cx="5120640" cy="256032"/>
+          </a:xfrm>
+          <a:prstGeom prst="rect">
+            <a:avLst/>
+          </a:prstGeom>
+          <a:noFill/>
+        </p:spPr>
+        <p:txBody>
+          <a:bodyPr wrap="square" lIns="0" rIns="0" tIns="0" bIns="0" anchor="t">
+            <a:spAutoFit/>
+          </a:bodyPr>
+          <a:lstStyle/>
+          <a:p>
+            <a:pPr algn="l">
+              <a:spcBef>
+                <a:spcPts val="0"/>
+              </a:spcBef>
+              <a:spcAft>
+                <a:spcPts val="0"/>
+              </a:spcAft>
+            </a:pPr>
+            <a:r>
+              <a:rPr sz="1250" b="1" i="0">
+                <a:solidFill>
+                  <a:srgbClr val="FFFFFF"/>
+                </a:solidFill>
+                <a:latin typeface="Segoe UI"/>
+              </a:rPr>
+              <a:t>A bit is held by a bistable circuit.</a:t>
+            </a:r>
+          </a:p>
+        </p:txBody>
+      </p:sp>
+      <p:sp>
+        <p:nvSpPr>
+          <p:cNvPr id="13" name="TextBox 12"/>
+          <p:cNvSpPr txBox="1"/>
+          <p:nvPr/>
+        </p:nvSpPr>
+        <p:spPr>
+          <a:xfrm>
+            <a:off x="1389888" y="3401568"/>
+            <a:ext cx="5120640" cy="384048"/>
+          </a:xfrm>
+          <a:prstGeom prst="rect">
+            <a:avLst/>
+          </a:prstGeom>
+          <a:noFill/>
+        </p:spPr>
+        <p:txBody>
+          <a:bodyPr wrap="square" lIns="0" rIns="0" tIns="0" bIns="0" anchor="t">
+            <a:spAutoFit/>
+          </a:bodyPr>
+          <a:lstStyle/>
+          <a:p>
+            <a:pPr algn="l">
+              <a:lnSpc>
+                <a:spcPct val="110000"/>
+              </a:lnSpc>
+              <a:spcBef>
+                <a:spcPts val="0"/>
+              </a:spcBef>
+              <a:spcAft>
+                <a:spcPts val="0"/>
+              </a:spcAft>
+            </a:pPr>
+            <a:r>
+              <a:rPr sz="1000" b="0" i="0">
+                <a:solidFill>
+                  <a:srgbClr val="9FB6C0"/>
+                </a:solidFill>
+                <a:latin typeface="Segoe UI"/>
+              </a:rPr>
+              <a:t>Flip-flops for speed in the CPU, capacitors for density in DRAM.</a:t>
+            </a:r>
+          </a:p>
+        </p:txBody>
+      </p:sp>
+      <p:sp>
+        <p:nvSpPr>
+          <p:cNvPr id="14" name="TextBox 13"/>
+          <p:cNvSpPr txBox="1"/>
+          <p:nvPr/>
+        </p:nvSpPr>
+        <p:spPr>
+          <a:xfrm>
+            <a:off x="822960" y="3895344"/>
+            <a:ext cx="475488" cy="237744"/>
+          </a:xfrm>
+          <a:prstGeom prst="rect">
+            <a:avLst/>
+          </a:prstGeom>
+          <a:noFill/>
+        </p:spPr>
+        <p:txBody>
+          <a:bodyPr wrap="square" lIns="0" rIns="0" tIns="0" bIns="0" anchor="t">
+            <a:spAutoFit/>
+          </a:bodyPr>
+          <a:lstStyle/>
+          <a:p>
+            <a:pPr algn="l">
+              <a:spcBef>
+                <a:spcPts val="0"/>
+              </a:spcBef>
+              <a:spcAft>
+                <a:spcPts val="0"/>
+              </a:spcAft>
+            </a:pPr>
+            <a:r>
+              <a:rPr sz="1100" b="1" i="0">
+                <a:solidFill>
+                  <a:srgbClr val="71C8C1"/>
+                </a:solidFill>
+                <a:latin typeface="Segoe UI Semibold"/>
+              </a:rPr>
+              <a:t>03</a:t>
+            </a:r>
+          </a:p>
+        </p:txBody>
+      </p:sp>
+      <p:sp>
+        <p:nvSpPr>
+          <p:cNvPr id="15" name="TextBox 14"/>
+          <p:cNvSpPr txBox="1"/>
+          <p:nvPr/>
+        </p:nvSpPr>
+        <p:spPr>
+          <a:xfrm>
+            <a:off x="1389888" y="3858768"/>
+            <a:ext cx="5120640" cy="256032"/>
+          </a:xfrm>
+          <a:prstGeom prst="rect">
+            <a:avLst/>
+          </a:prstGeom>
+          <a:noFill/>
+        </p:spPr>
+        <p:txBody>
+          <a:bodyPr wrap="square" lIns="0" rIns="0" tIns="0" bIns="0" anchor="t">
+            <a:spAutoFit/>
+          </a:bodyPr>
+          <a:lstStyle/>
+          <a:p>
+            <a:pPr algn="l">
+              <a:spcBef>
+                <a:spcPts val="0"/>
+              </a:spcBef>
+              <a:spcAft>
+                <a:spcPts val="0"/>
+              </a:spcAft>
+            </a:pPr>
+            <a:r>
+              <a:rPr sz="1250" b="1" i="0">
+                <a:solidFill>
+                  <a:srgbClr val="FFFFFF"/>
+                </a:solidFill>
+                <a:latin typeface="Segoe UI"/>
+              </a:rPr>
+              <a:t>A register is n flip-flops on one clock.</a:t>
+            </a:r>
+          </a:p>
+        </p:txBody>
+      </p:sp>
+      <p:sp>
+        <p:nvSpPr>
+          <p:cNvPr id="16" name="TextBox 15"/>
+          <p:cNvSpPr txBox="1"/>
+          <p:nvPr/>
+        </p:nvSpPr>
+        <p:spPr>
+          <a:xfrm>
+            <a:off x="1389888" y="4133087"/>
+            <a:ext cx="5120640" cy="384048"/>
+          </a:xfrm>
+          <a:prstGeom prst="rect">
+            <a:avLst/>
+          </a:prstGeom>
+          <a:noFill/>
+        </p:spPr>
+        <p:txBody>
+          <a:bodyPr wrap="square" lIns="0" rIns="0" tIns="0" bIns="0" anchor="t">
+            <a:spAutoFit/>
+          </a:bodyPr>
+          <a:lstStyle/>
+          <a:p>
+            <a:pPr algn="l">
+              <a:lnSpc>
+                <a:spcPct val="110000"/>
+              </a:lnSpc>
+              <a:spcBef>
+                <a:spcPts val="0"/>
+              </a:spcBef>
+              <a:spcAft>
+                <a:spcPts val="0"/>
+              </a:spcAft>
+            </a:pPr>
+            <a:r>
+              <a:rPr sz="1000" b="0" i="0">
+                <a:solidFill>
+                  <a:srgbClr val="9FB6C0"/>
+                </a:solidFill>
+                <a:latin typeface="Segoe UI"/>
+              </a:rPr>
+              <a:t>All bits update together, so a word is never read half-written.</a:t>
+            </a:r>
+          </a:p>
+        </p:txBody>
+      </p:sp>
+      <p:sp>
+        <p:nvSpPr>
+          <p:cNvPr id="17" name="TextBox 16"/>
+          <p:cNvSpPr txBox="1"/>
+          <p:nvPr/>
+        </p:nvSpPr>
+        <p:spPr>
+          <a:xfrm>
+            <a:off x="822960" y="4626864"/>
+            <a:ext cx="475488" cy="237744"/>
+          </a:xfrm>
+          <a:prstGeom prst="rect">
+            <a:avLst/>
+          </a:prstGeom>
+          <a:noFill/>
+        </p:spPr>
+        <p:txBody>
+          <a:bodyPr wrap="square" lIns="0" rIns="0" tIns="0" bIns="0" anchor="t">
+            <a:spAutoFit/>
+          </a:bodyPr>
+          <a:lstStyle/>
+          <a:p>
+            <a:pPr algn="l">
+              <a:spcBef>
+                <a:spcPts val="0"/>
+              </a:spcBef>
+              <a:spcAft>
+                <a:spcPts val="0"/>
+              </a:spcAft>
+            </a:pPr>
+            <a:r>
+              <a:rPr sz="1100" b="1" i="0">
+                <a:solidFill>
+                  <a:srgbClr val="71C8C1"/>
+                </a:solidFill>
+                <a:latin typeface="Segoe UI Semibold"/>
+              </a:rPr>
+              <a:t>04</a:t>
+            </a:r>
+          </a:p>
+        </p:txBody>
+      </p:sp>
+      <p:sp>
+        <p:nvSpPr>
+          <p:cNvPr id="18" name="TextBox 17"/>
+          <p:cNvSpPr txBox="1"/>
+          <p:nvPr/>
+        </p:nvSpPr>
+        <p:spPr>
+          <a:xfrm>
+            <a:off x="1389888" y="4590288"/>
+            <a:ext cx="5120640" cy="256032"/>
+          </a:xfrm>
+          <a:prstGeom prst="rect">
+            <a:avLst/>
+          </a:prstGeom>
+          <a:noFill/>
+        </p:spPr>
+        <p:txBody>
+          <a:bodyPr wrap="square" lIns="0" rIns="0" tIns="0" bIns="0" anchor="t">
+            <a:spAutoFit/>
+          </a:bodyPr>
+          <a:lstStyle/>
+          <a:p>
+            <a:pPr algn="l">
+              <a:spcBef>
+                <a:spcPts val="0"/>
+              </a:spcBef>
+              <a:spcAft>
+                <a:spcPts val="0"/>
+              </a:spcAft>
+            </a:pPr>
+            <a:r>
+              <a:rPr sz="1250" b="1" i="0">
+                <a:solidFill>
+                  <a:srgbClr val="FFFFFF"/>
+                </a:solidFill>
+                <a:latin typeface="Segoe UI"/>
+              </a:rPr>
+              <a:t>Control signals decide what happens.</a:t>
+            </a:r>
+          </a:p>
+        </p:txBody>
+      </p:sp>
+      <p:sp>
+        <p:nvSpPr>
+          <p:cNvPr id="19" name="TextBox 18"/>
+          <p:cNvSpPr txBox="1"/>
+          <p:nvPr/>
+        </p:nvSpPr>
+        <p:spPr>
+          <a:xfrm>
+            <a:off x="1389888" y="4864607"/>
+            <a:ext cx="5120640" cy="384048"/>
+          </a:xfrm>
+          <a:prstGeom prst="rect">
+            <a:avLst/>
+          </a:prstGeom>
+          <a:noFill/>
+        </p:spPr>
+        <p:txBody>
+          <a:bodyPr wrap="square" lIns="0" rIns="0" tIns="0" bIns="0" anchor="t">
+            <a:spAutoFit/>
+          </a:bodyPr>
+          <a:lstStyle/>
+          <a:p>
+            <a:pPr algn="l">
+              <a:lnSpc>
+                <a:spcPct val="110000"/>
+              </a:lnSpc>
+              <a:spcBef>
+                <a:spcPts val="0"/>
+              </a:spcBef>
+              <a:spcAft>
+                <a:spcPts val="0"/>
+              </a:spcAft>
+            </a:pPr>
+            <a:r>
+              <a:rPr sz="1000" b="0" i="0">
+                <a:solidFill>
+                  <a:srgbClr val="9FB6C0"/>
+                </a:solidFill>
+                <a:latin typeface="Segoe UI"/>
+              </a:rPr>
+              <a:t>Load to write, shift to move, tri-state enables to share one bus.</a:t>
+            </a:r>
+          </a:p>
+        </p:txBody>
+      </p:sp>
+      <p:sp>
+        <p:nvSpPr>
+          <p:cNvPr id="20" name="TextBox 19"/>
+          <p:cNvSpPr txBox="1"/>
+          <p:nvPr/>
+        </p:nvSpPr>
+        <p:spPr>
+          <a:xfrm>
+            <a:off x="822960" y="5358383"/>
+            <a:ext cx="475488" cy="237744"/>
+          </a:xfrm>
+          <a:prstGeom prst="rect">
+            <a:avLst/>
+          </a:prstGeom>
+          <a:noFill/>
+        </p:spPr>
+        <p:txBody>
+          <a:bodyPr wrap="square" lIns="0" rIns="0" tIns="0" bIns="0" anchor="t">
+            <a:spAutoFit/>
+          </a:bodyPr>
+          <a:lstStyle/>
+          <a:p>
+            <a:pPr algn="l">
+              <a:spcBef>
+                <a:spcPts val="0"/>
+              </a:spcBef>
+              <a:spcAft>
+                <a:spcPts val="0"/>
+              </a:spcAft>
+            </a:pPr>
+            <a:r>
+              <a:rPr sz="1100" b="1" i="0">
+                <a:solidFill>
+                  <a:srgbClr val="71C8C1"/>
+                </a:solidFill>
+                <a:latin typeface="Segoe UI Semibold"/>
+              </a:rPr>
+              <a:t>05</a:t>
+            </a:r>
+          </a:p>
+        </p:txBody>
+      </p:sp>
+      <p:sp>
+        <p:nvSpPr>
+          <p:cNvPr id="21" name="TextBox 20"/>
+          <p:cNvSpPr txBox="1"/>
+          <p:nvPr/>
+        </p:nvSpPr>
+        <p:spPr>
+          <a:xfrm>
+            <a:off x="1389888" y="5321807"/>
+            <a:ext cx="5120640" cy="256032"/>
+          </a:xfrm>
+          <a:prstGeom prst="rect">
+            <a:avLst/>
+          </a:prstGeom>
+          <a:noFill/>
+        </p:spPr>
+        <p:txBody>
+          <a:bodyPr wrap="square" lIns="0" rIns="0" tIns="0" bIns="0" anchor="t">
+            <a:spAutoFit/>
+          </a:bodyPr>
+          <a:lstStyle/>
+          <a:p>
+            <a:pPr algn="l">
+              <a:spcBef>
+                <a:spcPts val="0"/>
+              </a:spcBef>
+              <a:spcAft>
+                <a:spcPts val="0"/>
+              </a:spcAft>
+            </a:pPr>
+            <a:r>
+              <a:rPr sz="1250" b="1" i="0">
+                <a:solidFill>
+                  <a:srgbClr val="FFFFFF"/>
+                </a:solidFill>
+                <a:latin typeface="Segoe UI"/>
+              </a:rPr>
+              <a:t>Registers top the hierarchy.</a:t>
+            </a:r>
+          </a:p>
+        </p:txBody>
+      </p:sp>
+      <p:sp>
+        <p:nvSpPr>
+          <p:cNvPr id="22" name="TextBox 21"/>
+          <p:cNvSpPr txBox="1"/>
+          <p:nvPr/>
+        </p:nvSpPr>
+        <p:spPr>
+          <a:xfrm>
+            <a:off x="1389888" y="5596127"/>
+            <a:ext cx="5120640" cy="384048"/>
+          </a:xfrm>
+          <a:prstGeom prst="rect">
+            <a:avLst/>
+          </a:prstGeom>
+          <a:noFill/>
+        </p:spPr>
+        <p:txBody>
+          <a:bodyPr wrap="square" lIns="0" rIns="0" tIns="0" bIns="0" anchor="t">
+            <a:spAutoFit/>
+          </a:bodyPr>
+          <a:lstStyle/>
+          <a:p>
+            <a:pPr algn="l">
+              <a:lnSpc>
+                <a:spcPct val="110000"/>
+              </a:lnSpc>
+              <a:spcBef>
+                <a:spcPts val="0"/>
+              </a:spcBef>
+              <a:spcAft>
+                <a:spcPts val="0"/>
+              </a:spcAft>
+            </a:pPr>
+            <a:r>
+              <a:rPr sz="1000" b="0" i="0">
+                <a:solidFill>
+                  <a:srgbClr val="9FB6C0"/>
+                </a:solidFill>
+                <a:latin typeface="Segoe UI"/>
+              </a:rPr>
+              <a:t>Fast and small because they are flip-flops; memory is big and slow by design.</a:t>
+            </a:r>
+          </a:p>
+        </p:txBody>
+      </p:sp>
+      <p:sp>
+        <p:nvSpPr>
           <p:cNvPr id="23" name="TextBox 22"/>
           <p:cNvSpPr txBox="1"/>
           <p:nvPr/>
         </p:nvSpPr>
         <p:spPr>
           <a:xfrm>
-            <a:off x="7077456" y="2231136"/>
-            <a:ext cx="4160520" cy="219456"/>
+            <a:off x="6903720" y="1847088"/>
+            <a:ext cx="4480560" cy="237744"/>
           </a:xfrm>
           <a:prstGeom prst="rect">
             <a:avLst/>
@@ -25773,68 +26144,26 @@
               </a:spcAft>
             </a:pPr>
             <a:r>
-              <a:rPr sz="1000" b="1" i="0">
-                <a:solidFill>
-                  <a:srgbClr val="FFFFFF"/>
-                </a:solidFill>
-                <a:latin typeface="Segoe UI"/>
-              </a:rPr>
-              <a:t>Why 2ⁿ and not n²?</a:t>
-            </a:r>
-          </a:p>
-        </p:txBody>
-      </p:sp>
-      <p:sp>
-        <p:nvSpPr>
-          <p:cNvPr id="24" name="TextBox 23"/>
-          <p:cNvSpPr txBox="1"/>
-          <p:nvPr/>
-        </p:nvSpPr>
-        <p:spPr>
-          <a:xfrm>
-            <a:off x="7077456" y="2468879"/>
-            <a:ext cx="4160520" cy="219456"/>
-          </a:xfrm>
-          <a:prstGeom prst="rect">
-            <a:avLst/>
-          </a:prstGeom>
-          <a:noFill/>
-        </p:spPr>
-        <p:txBody>
-          <a:bodyPr wrap="square" lIns="0" rIns="0" tIns="0" bIns="0" anchor="t">
-            <a:spAutoFit/>
-          </a:bodyPr>
-          <a:lstStyle/>
-          <a:p>
-            <a:pPr algn="l">
-              <a:spcBef>
-                <a:spcPts val="0"/>
-              </a:spcBef>
-              <a:spcAft>
-                <a:spcPts val="0"/>
-              </a:spcAft>
-            </a:pPr>
-            <a:r>
-              <a:rPr sz="900" b="0" i="0">
-                <a:solidFill>
-                  <a:srgbClr val="9FB6C0"/>
-                </a:solidFill>
-                <a:latin typeface="Segoe UI"/>
-              </a:rPr>
-              <a:t>Each extra bit doubles the patterns.</a:t>
-            </a:r>
-          </a:p>
-        </p:txBody>
-      </p:sp>
-      <p:sp>
-        <p:nvSpPr>
-          <p:cNvPr id="25" name="Rounded Rectangle 24"/>
+              <a:rPr sz="950" b="1" i="0">
+                <a:solidFill>
+                  <a:srgbClr val="71C8C1"/>
+                </a:solidFill>
+                <a:latin typeface="Segoe UI Semibold"/>
+              </a:rPr>
+              <a:t>LIKELY QUESTIONS</a:t>
+            </a:r>
+          </a:p>
+        </p:txBody>
+      </p:sp>
+      <p:sp>
+        <p:nvSpPr>
+          <p:cNvPr id="24" name="Rounded Rectangle 23"/>
           <p:cNvSpPr/>
           <p:nvPr/>
         </p:nvSpPr>
         <p:spPr>
           <a:xfrm>
-            <a:off x="6903720" y="2834639"/>
+            <a:off x="6903720" y="2157984"/>
             <a:ext cx="4480560" cy="603504"/>
           </a:xfrm>
           <a:prstGeom prst="roundRect">
@@ -25874,13 +26203,55 @@
       </p:sp>
       <p:sp>
         <p:nvSpPr>
+          <p:cNvPr id="25" name="TextBox 24"/>
+          <p:cNvSpPr txBox="1"/>
+          <p:nvPr/>
+        </p:nvSpPr>
+        <p:spPr>
+          <a:xfrm>
+            <a:off x="7077456" y="2231136"/>
+            <a:ext cx="4160520" cy="219456"/>
+          </a:xfrm>
+          <a:prstGeom prst="rect">
+            <a:avLst/>
+          </a:prstGeom>
+          <a:noFill/>
+        </p:spPr>
+        <p:txBody>
+          <a:bodyPr wrap="square" lIns="0" rIns="0" tIns="0" bIns="0" anchor="t">
+            <a:spAutoFit/>
+          </a:bodyPr>
+          <a:lstStyle/>
+          <a:p>
+            <a:pPr algn="l">
+              <a:spcBef>
+                <a:spcPts val="0"/>
+              </a:spcBef>
+              <a:spcAft>
+                <a:spcPts val="0"/>
+              </a:spcAft>
+            </a:pPr>
+            <a:r>
+              <a:rPr sz="1000" b="1" i="0">
+                <a:solidFill>
+                  <a:srgbClr val="FFFFFF"/>
+                </a:solidFill>
+                <a:latin typeface="Segoe UI"/>
+              </a:rPr>
+              <a:t>Why 2ⁿ and not n²?</a:t>
+            </a:r>
+          </a:p>
+        </p:txBody>
+      </p:sp>
+      <p:sp>
+        <p:nvSpPr>
           <p:cNvPr id="26" name="TextBox 25"/>
           <p:cNvSpPr txBox="1"/>
           <p:nvPr/>
         </p:nvSpPr>
         <p:spPr>
           <a:xfrm>
-            <a:off x="7077456" y="2907791"/>
+            <a:off x="7077456" y="2468879"/>
             <a:ext cx="4160520" cy="219456"/>
           </a:xfrm>
           <a:prstGeom prst="rect">
@@ -25903,68 +26274,26 @@
               </a:spcAft>
             </a:pPr>
             <a:r>
-              <a:rPr sz="1000" b="1" i="0">
-                <a:solidFill>
-                  <a:srgbClr val="FFFFFF"/>
+              <a:rPr sz="900" b="0" i="0">
+                <a:solidFill>
+                  <a:srgbClr val="9FB6C0"/>
                 </a:solidFill>
                 <a:latin typeface="Segoe UI"/>
               </a:rPr>
-              <a:t>Register vs. cache?</a:t>
-            </a:r>
-          </a:p>
-        </p:txBody>
-      </p:sp>
-      <p:sp>
-        <p:nvSpPr>
-          <p:cNvPr id="27" name="TextBox 26"/>
-          <p:cNvSpPr txBox="1"/>
-          <p:nvPr/>
-        </p:nvSpPr>
-        <p:spPr>
-          <a:xfrm>
-            <a:off x="7077456" y="3145535"/>
-            <a:ext cx="4160520" cy="219456"/>
-          </a:xfrm>
-          <a:prstGeom prst="rect">
-            <a:avLst/>
-          </a:prstGeom>
-          <a:noFill/>
-        </p:spPr>
-        <p:txBody>
-          <a:bodyPr wrap="square" lIns="0" rIns="0" tIns="0" bIns="0" anchor="t">
-            <a:spAutoFit/>
-          </a:bodyPr>
-          <a:lstStyle/>
-          <a:p>
-            <a:pPr algn="l">
-              <a:spcBef>
-                <a:spcPts val="0"/>
-              </a:spcBef>
-              <a:spcAft>
-                <a:spcPts val="0"/>
-              </a:spcAft>
-            </a:pPr>
-            <a:r>
-              <a:rPr sz="900" b="0" i="0">
-                <a:solidFill>
-                  <a:srgbClr val="9FB6C0"/>
-                </a:solidFill>
-                <a:latin typeface="Segoe UI"/>
-              </a:rPr>
-              <a:t>Register: by name, ~1 cycle. Cache: by address.</a:t>
-            </a:r>
-          </a:p>
-        </p:txBody>
-      </p:sp>
-      <p:sp>
-        <p:nvSpPr>
-          <p:cNvPr id="28" name="Rounded Rectangle 27"/>
+              <a:t>Each extra bit doubles the patterns.</a:t>
+            </a:r>
+          </a:p>
+        </p:txBody>
+      </p:sp>
+      <p:sp>
+        <p:nvSpPr>
+          <p:cNvPr id="27" name="Rounded Rectangle 26"/>
           <p:cNvSpPr/>
           <p:nvPr/>
         </p:nvSpPr>
         <p:spPr>
           <a:xfrm>
-            <a:off x="6903720" y="3511296"/>
+            <a:off x="6903720" y="2834639"/>
             <a:ext cx="4480560" cy="603504"/>
           </a:xfrm>
           <a:prstGeom prst="roundRect">
@@ -26004,13 +26333,55 @@
       </p:sp>
       <p:sp>
         <p:nvSpPr>
+          <p:cNvPr id="28" name="TextBox 27"/>
+          <p:cNvSpPr txBox="1"/>
+          <p:nvPr/>
+        </p:nvSpPr>
+        <p:spPr>
+          <a:xfrm>
+            <a:off x="7077456" y="2907791"/>
+            <a:ext cx="4160520" cy="219456"/>
+          </a:xfrm>
+          <a:prstGeom prst="rect">
+            <a:avLst/>
+          </a:prstGeom>
+          <a:noFill/>
+        </p:spPr>
+        <p:txBody>
+          <a:bodyPr wrap="square" lIns="0" rIns="0" tIns="0" bIns="0" anchor="t">
+            <a:spAutoFit/>
+          </a:bodyPr>
+          <a:lstStyle/>
+          <a:p>
+            <a:pPr algn="l">
+              <a:spcBef>
+                <a:spcPts val="0"/>
+              </a:spcBef>
+              <a:spcAft>
+                <a:spcPts val="0"/>
+              </a:spcAft>
+            </a:pPr>
+            <a:r>
+              <a:rPr sz="1000" b="1" i="0">
+                <a:solidFill>
+                  <a:srgbClr val="FFFFFF"/>
+                </a:solidFill>
+                <a:latin typeface="Segoe UI"/>
+              </a:rPr>
+              <a:t>Register vs. cache?</a:t>
+            </a:r>
+          </a:p>
+        </p:txBody>
+      </p:sp>
+      <p:sp>
+        <p:nvSpPr>
           <p:cNvPr id="29" name="TextBox 28"/>
           <p:cNvSpPr txBox="1"/>
           <p:nvPr/>
         </p:nvSpPr>
         <p:spPr>
           <a:xfrm>
-            <a:off x="7077456" y="3584448"/>
+            <a:off x="7077456" y="3145535"/>
             <a:ext cx="4160520" cy="219456"/>
           </a:xfrm>
           <a:prstGeom prst="rect">
@@ -26033,68 +26404,26 @@
               </a:spcAft>
             </a:pPr>
             <a:r>
-              <a:rPr sz="1000" b="1" i="0">
-                <a:solidFill>
-                  <a:srgbClr val="FFFFFF"/>
+              <a:rPr sz="900" b="0" i="0">
+                <a:solidFill>
+                  <a:srgbClr val="9FB6C0"/>
                 </a:solidFill>
                 <a:latin typeface="Segoe UI"/>
               </a:rPr>
-              <a:t>Why refresh DRAM?</a:t>
-            </a:r>
-          </a:p>
-        </p:txBody>
-      </p:sp>
-      <p:sp>
-        <p:nvSpPr>
-          <p:cNvPr id="30" name="TextBox 29"/>
-          <p:cNvSpPr txBox="1"/>
-          <p:nvPr/>
-        </p:nvSpPr>
-        <p:spPr>
-          <a:xfrm>
-            <a:off x="7077456" y="3822191"/>
-            <a:ext cx="4160520" cy="219456"/>
-          </a:xfrm>
-          <a:prstGeom prst="rect">
-            <a:avLst/>
-          </a:prstGeom>
-          <a:noFill/>
-        </p:spPr>
-        <p:txBody>
-          <a:bodyPr wrap="square" lIns="0" rIns="0" tIns="0" bIns="0" anchor="t">
-            <a:spAutoFit/>
-          </a:bodyPr>
-          <a:lstStyle/>
-          <a:p>
-            <a:pPr algn="l">
-              <a:spcBef>
-                <a:spcPts val="0"/>
-              </a:spcBef>
-              <a:spcAft>
-                <a:spcPts val="0"/>
-              </a:spcAft>
-            </a:pPr>
-            <a:r>
-              <a:rPr sz="900" b="0" i="0">
-                <a:solidFill>
-                  <a:srgbClr val="9FB6C0"/>
-                </a:solidFill>
-                <a:latin typeface="Segoe UI"/>
-              </a:rPr>
-              <a:t>The capacitor charge leaks away.</a:t>
-            </a:r>
-          </a:p>
-        </p:txBody>
-      </p:sp>
-      <p:sp>
-        <p:nvSpPr>
-          <p:cNvPr id="31" name="Rounded Rectangle 30"/>
+              <a:t>Register: by name, ~1 cycle. Cache: by address.</a:t>
+            </a:r>
+          </a:p>
+        </p:txBody>
+      </p:sp>
+      <p:sp>
+        <p:nvSpPr>
+          <p:cNvPr id="30" name="Rounded Rectangle 29"/>
           <p:cNvSpPr/>
           <p:nvPr/>
         </p:nvSpPr>
         <p:spPr>
           <a:xfrm>
-            <a:off x="6903720" y="4187952"/>
+            <a:off x="6903720" y="3511296"/>
             <a:ext cx="4480560" cy="603504"/>
           </a:xfrm>
           <a:prstGeom prst="roundRect">
@@ -26134,7 +26463,137 @@
       </p:sp>
       <p:sp>
         <p:nvSpPr>
+          <p:cNvPr id="31" name="TextBox 30"/>
+          <p:cNvSpPr txBox="1"/>
+          <p:nvPr/>
+        </p:nvSpPr>
+        <p:spPr>
+          <a:xfrm>
+            <a:off x="7077456" y="3584448"/>
+            <a:ext cx="4160520" cy="219456"/>
+          </a:xfrm>
+          <a:prstGeom prst="rect">
+            <a:avLst/>
+          </a:prstGeom>
+          <a:noFill/>
+        </p:spPr>
+        <p:txBody>
+          <a:bodyPr wrap="square" lIns="0" rIns="0" tIns="0" bIns="0" anchor="t">
+            <a:spAutoFit/>
+          </a:bodyPr>
+          <a:lstStyle/>
+          <a:p>
+            <a:pPr algn="l">
+              <a:spcBef>
+                <a:spcPts val="0"/>
+              </a:spcBef>
+              <a:spcAft>
+                <a:spcPts val="0"/>
+              </a:spcAft>
+            </a:pPr>
+            <a:r>
+              <a:rPr sz="1000" b="1" i="0">
+                <a:solidFill>
+                  <a:srgbClr val="FFFFFF"/>
+                </a:solidFill>
+                <a:latin typeface="Segoe UI"/>
+              </a:rPr>
+              <a:t>Why refresh DRAM?</a:t>
+            </a:r>
+          </a:p>
+        </p:txBody>
+      </p:sp>
+      <p:sp>
+        <p:nvSpPr>
           <p:cNvPr id="32" name="TextBox 31"/>
+          <p:cNvSpPr txBox="1"/>
+          <p:nvPr/>
+        </p:nvSpPr>
+        <p:spPr>
+          <a:xfrm>
+            <a:off x="7077456" y="3822191"/>
+            <a:ext cx="4160520" cy="219456"/>
+          </a:xfrm>
+          <a:prstGeom prst="rect">
+            <a:avLst/>
+          </a:prstGeom>
+          <a:noFill/>
+        </p:spPr>
+        <p:txBody>
+          <a:bodyPr wrap="square" lIns="0" rIns="0" tIns="0" bIns="0" anchor="t">
+            <a:spAutoFit/>
+          </a:bodyPr>
+          <a:lstStyle/>
+          <a:p>
+            <a:pPr algn="l">
+              <a:spcBef>
+                <a:spcPts val="0"/>
+              </a:spcBef>
+              <a:spcAft>
+                <a:spcPts val="0"/>
+              </a:spcAft>
+            </a:pPr>
+            <a:r>
+              <a:rPr sz="900" b="0" i="0">
+                <a:solidFill>
+                  <a:srgbClr val="9FB6C0"/>
+                </a:solidFill>
+                <a:latin typeface="Segoe UI"/>
+              </a:rPr>
+              <a:t>The capacitor charge leaks away.</a:t>
+            </a:r>
+          </a:p>
+        </p:txBody>
+      </p:sp>
+      <p:sp>
+        <p:nvSpPr>
+          <p:cNvPr id="33" name="Rounded Rectangle 32"/>
+          <p:cNvSpPr/>
+          <p:nvPr/>
+        </p:nvSpPr>
+        <p:spPr>
+          <a:xfrm>
+            <a:off x="6903720" y="4187952"/>
+            <a:ext cx="4480560" cy="603504"/>
+          </a:xfrm>
+          <a:prstGeom prst="roundRect">
+            <a:avLst>
+              <a:gd name="adj" fmla="val 12000"/>
+            </a:avLst>
+          </a:prstGeom>
+          <a:solidFill>
+            <a:srgbClr val="142B38"/>
+          </a:solidFill>
+          <a:ln>
+            <a:noFill/>
+          </a:ln>
+          <a:effectLst/>
+        </p:spPr>
+        <p:style>
+          <a:lnRef idx="1">
+            <a:schemeClr val="accent1"/>
+          </a:lnRef>
+          <a:fillRef idx="3">
+            <a:schemeClr val="accent1"/>
+          </a:fillRef>
+          <a:effectRef idx="2">
+            <a:schemeClr val="accent1"/>
+          </a:effectRef>
+          <a:fontRef idx="minor">
+            <a:schemeClr val="lt1"/>
+          </a:fontRef>
+        </p:style>
+        <p:txBody>
+          <a:bodyPr rtlCol="0" anchor="ctr" wrap="square"/>
+          <a:lstStyle/>
+          <a:p>
+            <a:pPr algn="ctr"/>
+          </a:p>
+        </p:txBody>
+      </p:sp>
+      <p:sp>
+        <p:nvSpPr>
+          <p:cNvPr id="34" name="TextBox 33"/>
           <p:cNvSpPr txBox="1"/>
           <p:nvPr/>
         </p:nvSpPr>
@@ -26176,7 +26635,7 @@
       </p:sp>
       <p:sp>
         <p:nvSpPr>
-          <p:cNvPr id="33" name="TextBox 32"/>
+          <p:cNvPr id="35" name="TextBox 34"/>
           <p:cNvSpPr txBox="1"/>
           <p:nvPr/>
         </p:nvSpPr>
@@ -26218,7 +26677,7 @@
       </p:sp>
       <p:sp>
         <p:nvSpPr>
-          <p:cNvPr id="34" name="TextBox 33"/>
+          <p:cNvPr id="36" name="TextBox 35"/>
           <p:cNvSpPr txBox="1"/>
           <p:nvPr/>
         </p:nvSpPr>
@@ -26260,7 +26719,7 @@
       </p:sp>
       <p:sp>
         <p:nvSpPr>
-          <p:cNvPr id="35" name="TextBox 34"/>
+          <p:cNvPr id="37" name="TextBox 36"/>
           <p:cNvSpPr txBox="1"/>
           <p:nvPr/>
         </p:nvSpPr>
@@ -26349,7 +26808,7 @@
       </p:sp>
       <p:sp>
         <p:nvSpPr>
-          <p:cNvPr id="36" name="TextBox 35"/>
+          <p:cNvPr id="38" name="TextBox 37"/>
           <p:cNvSpPr txBox="1"/>
           <p:nvPr/>
         </p:nvSpPr>
